--- a/StrokeCog.pptx
+++ b/StrokeCog.pptx
@@ -4,9 +4,16 @@
   <p:sldMasterIdLst>
     <p:sldMasterId id="2147483648" r:id="rId1"/>
   </p:sldMasterIdLst>
+  <p:notesMasterIdLst>
+    <p:notesMasterId r:id="rId8"/>
+  </p:notesMasterIdLst>
   <p:sldIdLst>
     <p:sldId id="256" r:id="rId2"/>
     <p:sldId id="257" r:id="rId3"/>
+    <p:sldId id="258" r:id="rId4"/>
+    <p:sldId id="259" r:id="rId5"/>
+    <p:sldId id="260" r:id="rId6"/>
+    <p:sldId id="261" r:id="rId7"/>
   </p:sldIdLst>
   <p:sldSz cx="12192000" cy="6858000"/>
   <p:notesSz cx="6858000" cy="9144000"/>
@@ -105,7 +112,446 @@
       </a:defRPr>
     </a:lvl9pPr>
   </p:defaultTextStyle>
+  <p:extLst>
+    <p:ext uri="{EFAFB233-063F-42B5-8137-9DF3F51BA10A}">
+      <p15:sldGuideLst xmlns:p15="http://schemas.microsoft.com/office/powerpoint/2012/main"/>
+    </p:ext>
+  </p:extLst>
 </p:presentation>
+</file>
+
+<file path=ppt/notesMasters/notesMaster1.xml><?xml version="1.0" encoding="utf-8"?>
+<p:notesMaster xmlns:a="http://schemas.openxmlformats.org/drawingml/2006/main" xmlns:r="http://schemas.openxmlformats.org/officeDocument/2006/relationships" xmlns:p="http://schemas.openxmlformats.org/presentationml/2006/main">
+  <p:cSld>
+    <p:bg>
+      <p:bgRef idx="1001">
+        <a:schemeClr val="bg1"/>
+      </p:bgRef>
+    </p:bg>
+    <p:spTree>
+      <p:nvGrpSpPr>
+        <p:cNvPr id="1" name=""/>
+        <p:cNvGrpSpPr/>
+        <p:nvPr/>
+      </p:nvGrpSpPr>
+      <p:grpSpPr>
+        <a:xfrm>
+          <a:off x="0" y="0"/>
+          <a:ext cx="0" cy="0"/>
+          <a:chOff x="0" y="0"/>
+          <a:chExt cx="0" cy="0"/>
+        </a:xfrm>
+      </p:grpSpPr>
+      <p:sp>
+        <p:nvSpPr>
+          <p:cNvPr id="2" name="Header Placeholder 1"/>
+          <p:cNvSpPr>
+            <a:spLocks noGrp="1"/>
+          </p:cNvSpPr>
+          <p:nvPr>
+            <p:ph type="hdr" sz="quarter"/>
+          </p:nvPr>
+        </p:nvSpPr>
+        <p:spPr>
+          <a:xfrm>
+            <a:off x="0" y="0"/>
+            <a:ext cx="2971800" cy="458788"/>
+          </a:xfrm>
+          <a:prstGeom prst="rect">
+            <a:avLst/>
+          </a:prstGeom>
+        </p:spPr>
+        <p:txBody>
+          <a:bodyPr vert="horz" lIns="91440" tIns="45720" rIns="91440" bIns="45720" rtlCol="0"/>
+          <a:lstStyle>
+            <a:lvl1pPr algn="l">
+              <a:defRPr sz="1200"/>
+            </a:lvl1pPr>
+          </a:lstStyle>
+          <a:p>
+            <a:endParaRPr lang="en-CA"/>
+          </a:p>
+        </p:txBody>
+      </p:sp>
+      <p:sp>
+        <p:nvSpPr>
+          <p:cNvPr id="3" name="Date Placeholder 2"/>
+          <p:cNvSpPr>
+            <a:spLocks noGrp="1"/>
+          </p:cNvSpPr>
+          <p:nvPr>
+            <p:ph type="dt" idx="1"/>
+          </p:nvPr>
+        </p:nvSpPr>
+        <p:spPr>
+          <a:xfrm>
+            <a:off x="3884613" y="0"/>
+            <a:ext cx="2971800" cy="458788"/>
+          </a:xfrm>
+          <a:prstGeom prst="rect">
+            <a:avLst/>
+          </a:prstGeom>
+        </p:spPr>
+        <p:txBody>
+          <a:bodyPr vert="horz" lIns="91440" tIns="45720" rIns="91440" bIns="45720" rtlCol="0"/>
+          <a:lstStyle>
+            <a:lvl1pPr algn="r">
+              <a:defRPr sz="1200"/>
+            </a:lvl1pPr>
+          </a:lstStyle>
+          <a:p>
+            <a:fld id="{19F579D8-1E49-4757-B5B6-80F0A8C2CECC}" type="datetimeFigureOut">
+              <a:rPr lang="en-CA" smtClean="0"/>
+              <a:t>2026-06-23</a:t>
+            </a:fld>
+            <a:endParaRPr lang="en-CA"/>
+          </a:p>
+        </p:txBody>
+      </p:sp>
+      <p:sp>
+        <p:nvSpPr>
+          <p:cNvPr id="4" name="Slide Image Placeholder 3"/>
+          <p:cNvSpPr>
+            <a:spLocks noGrp="1" noRot="1" noChangeAspect="1"/>
+          </p:cNvSpPr>
+          <p:nvPr>
+            <p:ph type="sldImg" idx="2"/>
+          </p:nvPr>
+        </p:nvSpPr>
+        <p:spPr>
+          <a:xfrm>
+            <a:off x="685800" y="1143000"/>
+            <a:ext cx="5486400" cy="3086100"/>
+          </a:xfrm>
+          <a:prstGeom prst="rect">
+            <a:avLst/>
+          </a:prstGeom>
+          <a:noFill/>
+          <a:ln w="12700">
+            <a:solidFill>
+              <a:prstClr val="black"/>
+            </a:solidFill>
+          </a:ln>
+        </p:spPr>
+        <p:txBody>
+          <a:bodyPr vert="horz" lIns="91440" tIns="45720" rIns="91440" bIns="45720" rtlCol="0" anchor="ctr"/>
+          <a:lstStyle/>
+          <a:p>
+            <a:endParaRPr lang="en-CA"/>
+          </a:p>
+        </p:txBody>
+      </p:sp>
+      <p:sp>
+        <p:nvSpPr>
+          <p:cNvPr id="5" name="Notes Placeholder 4"/>
+          <p:cNvSpPr>
+            <a:spLocks noGrp="1"/>
+          </p:cNvSpPr>
+          <p:nvPr>
+            <p:ph type="body" sz="quarter" idx="3"/>
+          </p:nvPr>
+        </p:nvSpPr>
+        <p:spPr>
+          <a:xfrm>
+            <a:off x="685800" y="4400550"/>
+            <a:ext cx="5486400" cy="3600450"/>
+          </a:xfrm>
+          <a:prstGeom prst="rect">
+            <a:avLst/>
+          </a:prstGeom>
+        </p:spPr>
+        <p:txBody>
+          <a:bodyPr vert="horz" lIns="91440" tIns="45720" rIns="91440" bIns="45720" rtlCol="0"/>
+          <a:lstStyle/>
+          <a:p>
+            <a:pPr lvl="0"/>
+            <a:r>
+              <a:rPr lang="en-US"/>
+              <a:t>Click to edit Master text styles</a:t>
+            </a:r>
+          </a:p>
+          <a:p>
+            <a:pPr lvl="1"/>
+            <a:r>
+              <a:rPr lang="en-US"/>
+              <a:t>Second level</a:t>
+            </a:r>
+          </a:p>
+          <a:p>
+            <a:pPr lvl="2"/>
+            <a:r>
+              <a:rPr lang="en-US"/>
+              <a:t>Third level</a:t>
+            </a:r>
+          </a:p>
+          <a:p>
+            <a:pPr lvl="3"/>
+            <a:r>
+              <a:rPr lang="en-US"/>
+              <a:t>Fourth level</a:t>
+            </a:r>
+          </a:p>
+          <a:p>
+            <a:pPr lvl="4"/>
+            <a:r>
+              <a:rPr lang="en-US"/>
+              <a:t>Fifth level</a:t>
+            </a:r>
+            <a:endParaRPr lang="en-CA"/>
+          </a:p>
+        </p:txBody>
+      </p:sp>
+      <p:sp>
+        <p:nvSpPr>
+          <p:cNvPr id="6" name="Footer Placeholder 5"/>
+          <p:cNvSpPr>
+            <a:spLocks noGrp="1"/>
+          </p:cNvSpPr>
+          <p:nvPr>
+            <p:ph type="ftr" sz="quarter" idx="4"/>
+          </p:nvPr>
+        </p:nvSpPr>
+        <p:spPr>
+          <a:xfrm>
+            <a:off x="0" y="8685213"/>
+            <a:ext cx="2971800" cy="458787"/>
+          </a:xfrm>
+          <a:prstGeom prst="rect">
+            <a:avLst/>
+          </a:prstGeom>
+        </p:spPr>
+        <p:txBody>
+          <a:bodyPr vert="horz" lIns="91440" tIns="45720" rIns="91440" bIns="45720" rtlCol="0" anchor="b"/>
+          <a:lstStyle>
+            <a:lvl1pPr algn="l">
+              <a:defRPr sz="1200"/>
+            </a:lvl1pPr>
+          </a:lstStyle>
+          <a:p>
+            <a:endParaRPr lang="en-CA"/>
+          </a:p>
+        </p:txBody>
+      </p:sp>
+      <p:sp>
+        <p:nvSpPr>
+          <p:cNvPr id="7" name="Slide Number Placeholder 6"/>
+          <p:cNvSpPr>
+            <a:spLocks noGrp="1"/>
+          </p:cNvSpPr>
+          <p:nvPr>
+            <p:ph type="sldNum" sz="quarter" idx="5"/>
+          </p:nvPr>
+        </p:nvSpPr>
+        <p:spPr>
+          <a:xfrm>
+            <a:off x="3884613" y="8685213"/>
+            <a:ext cx="2971800" cy="458787"/>
+          </a:xfrm>
+          <a:prstGeom prst="rect">
+            <a:avLst/>
+          </a:prstGeom>
+        </p:spPr>
+        <p:txBody>
+          <a:bodyPr vert="horz" lIns="91440" tIns="45720" rIns="91440" bIns="45720" rtlCol="0" anchor="b"/>
+          <a:lstStyle>
+            <a:lvl1pPr algn="r">
+              <a:defRPr sz="1200"/>
+            </a:lvl1pPr>
+          </a:lstStyle>
+          <a:p>
+            <a:fld id="{D019A229-123F-41E7-81DB-A09700CC8DF9}" type="slidenum">
+              <a:rPr lang="en-CA" smtClean="0"/>
+              <a:t>‹#›</a:t>
+            </a:fld>
+            <a:endParaRPr lang="en-CA"/>
+          </a:p>
+        </p:txBody>
+      </p:sp>
+    </p:spTree>
+    <p:extLst>
+      <p:ext uri="{BB962C8B-B14F-4D97-AF65-F5344CB8AC3E}">
+        <p14:creationId xmlns:p14="http://schemas.microsoft.com/office/powerpoint/2010/main" val="3149709336"/>
+      </p:ext>
+    </p:extLst>
+  </p:cSld>
+  <p:clrMap bg1="lt1" tx1="dk1" bg2="lt2" tx2="dk2" accent1="accent1" accent2="accent2" accent3="accent3" accent4="accent4" accent5="accent5" accent6="accent6" hlink="hlink" folHlink="folHlink"/>
+  <p:notesStyle>
+    <a:lvl1pPr marL="0" algn="l" defTabSz="914400" rtl="0" eaLnBrk="1" latinLnBrk="0" hangingPunct="1">
+      <a:defRPr sz="1200" kern="1200">
+        <a:solidFill>
+          <a:schemeClr val="tx1"/>
+        </a:solidFill>
+        <a:latin typeface="+mn-lt"/>
+        <a:ea typeface="+mn-ea"/>
+        <a:cs typeface="+mn-cs"/>
+      </a:defRPr>
+    </a:lvl1pPr>
+    <a:lvl2pPr marL="457200" algn="l" defTabSz="914400" rtl="0" eaLnBrk="1" latinLnBrk="0" hangingPunct="1">
+      <a:defRPr sz="1200" kern="1200">
+        <a:solidFill>
+          <a:schemeClr val="tx1"/>
+        </a:solidFill>
+        <a:latin typeface="+mn-lt"/>
+        <a:ea typeface="+mn-ea"/>
+        <a:cs typeface="+mn-cs"/>
+      </a:defRPr>
+    </a:lvl2pPr>
+    <a:lvl3pPr marL="914400" algn="l" defTabSz="914400" rtl="0" eaLnBrk="1" latinLnBrk="0" hangingPunct="1">
+      <a:defRPr sz="1200" kern="1200">
+        <a:solidFill>
+          <a:schemeClr val="tx1"/>
+        </a:solidFill>
+        <a:latin typeface="+mn-lt"/>
+        <a:ea typeface="+mn-ea"/>
+        <a:cs typeface="+mn-cs"/>
+      </a:defRPr>
+    </a:lvl3pPr>
+    <a:lvl4pPr marL="1371600" algn="l" defTabSz="914400" rtl="0" eaLnBrk="1" latinLnBrk="0" hangingPunct="1">
+      <a:defRPr sz="1200" kern="1200">
+        <a:solidFill>
+          <a:schemeClr val="tx1"/>
+        </a:solidFill>
+        <a:latin typeface="+mn-lt"/>
+        <a:ea typeface="+mn-ea"/>
+        <a:cs typeface="+mn-cs"/>
+      </a:defRPr>
+    </a:lvl4pPr>
+    <a:lvl5pPr marL="1828800" algn="l" defTabSz="914400" rtl="0" eaLnBrk="1" latinLnBrk="0" hangingPunct="1">
+      <a:defRPr sz="1200" kern="1200">
+        <a:solidFill>
+          <a:schemeClr val="tx1"/>
+        </a:solidFill>
+        <a:latin typeface="+mn-lt"/>
+        <a:ea typeface="+mn-ea"/>
+        <a:cs typeface="+mn-cs"/>
+      </a:defRPr>
+    </a:lvl5pPr>
+    <a:lvl6pPr marL="2286000" algn="l" defTabSz="914400" rtl="0" eaLnBrk="1" latinLnBrk="0" hangingPunct="1">
+      <a:defRPr sz="1200" kern="1200">
+        <a:solidFill>
+          <a:schemeClr val="tx1"/>
+        </a:solidFill>
+        <a:latin typeface="+mn-lt"/>
+        <a:ea typeface="+mn-ea"/>
+        <a:cs typeface="+mn-cs"/>
+      </a:defRPr>
+    </a:lvl6pPr>
+    <a:lvl7pPr marL="2743200" algn="l" defTabSz="914400" rtl="0" eaLnBrk="1" latinLnBrk="0" hangingPunct="1">
+      <a:defRPr sz="1200" kern="1200">
+        <a:solidFill>
+          <a:schemeClr val="tx1"/>
+        </a:solidFill>
+        <a:latin typeface="+mn-lt"/>
+        <a:ea typeface="+mn-ea"/>
+        <a:cs typeface="+mn-cs"/>
+      </a:defRPr>
+    </a:lvl7pPr>
+    <a:lvl8pPr marL="3200400" algn="l" defTabSz="914400" rtl="0" eaLnBrk="1" latinLnBrk="0" hangingPunct="1">
+      <a:defRPr sz="1200" kern="1200">
+        <a:solidFill>
+          <a:schemeClr val="tx1"/>
+        </a:solidFill>
+        <a:latin typeface="+mn-lt"/>
+        <a:ea typeface="+mn-ea"/>
+        <a:cs typeface="+mn-cs"/>
+      </a:defRPr>
+    </a:lvl8pPr>
+    <a:lvl9pPr marL="3657600" algn="l" defTabSz="914400" rtl="0" eaLnBrk="1" latinLnBrk="0" hangingPunct="1">
+      <a:defRPr sz="1200" kern="1200">
+        <a:solidFill>
+          <a:schemeClr val="tx1"/>
+        </a:solidFill>
+        <a:latin typeface="+mn-lt"/>
+        <a:ea typeface="+mn-ea"/>
+        <a:cs typeface="+mn-cs"/>
+      </a:defRPr>
+    </a:lvl9pPr>
+  </p:notesStyle>
+</p:notesMaster>
+</file>
+
+<file path=ppt/notesSlides/notesSlide1.xml><?xml version="1.0" encoding="utf-8"?>
+<p:notes xmlns:a="http://schemas.openxmlformats.org/drawingml/2006/main" xmlns:r="http://schemas.openxmlformats.org/officeDocument/2006/relationships" xmlns:p="http://schemas.openxmlformats.org/presentationml/2006/main">
+  <p:cSld>
+    <p:spTree>
+      <p:nvGrpSpPr>
+        <p:cNvPr id="1" name=""/>
+        <p:cNvGrpSpPr/>
+        <p:nvPr/>
+      </p:nvGrpSpPr>
+      <p:grpSpPr>
+        <a:xfrm>
+          <a:off x="0" y="0"/>
+          <a:ext cx="0" cy="0"/>
+          <a:chOff x="0" y="0"/>
+          <a:chExt cx="0" cy="0"/>
+        </a:xfrm>
+      </p:grpSpPr>
+      <p:sp>
+        <p:nvSpPr>
+          <p:cNvPr id="2" name="Slide Image Placeholder 1"/>
+          <p:cNvSpPr>
+            <a:spLocks noGrp="1" noRot="1" noChangeAspect="1"/>
+          </p:cNvSpPr>
+          <p:nvPr>
+            <p:ph type="sldImg"/>
+          </p:nvPr>
+        </p:nvSpPr>
+        <p:spPr/>
+      </p:sp>
+      <p:sp>
+        <p:nvSpPr>
+          <p:cNvPr id="3" name="Notes Placeholder 2"/>
+          <p:cNvSpPr>
+            <a:spLocks noGrp="1"/>
+          </p:cNvSpPr>
+          <p:nvPr>
+            <p:ph type="body" idx="1"/>
+          </p:nvPr>
+        </p:nvSpPr>
+        <p:spPr/>
+        <p:txBody>
+          <a:bodyPr/>
+          <a:lstStyle/>
+          <a:p>
+            <a:endParaRPr lang="en-CA" dirty="0"/>
+          </a:p>
+        </p:txBody>
+      </p:sp>
+      <p:sp>
+        <p:nvSpPr>
+          <p:cNvPr id="4" name="Slide Number Placeholder 3"/>
+          <p:cNvSpPr>
+            <a:spLocks noGrp="1"/>
+          </p:cNvSpPr>
+          <p:nvPr>
+            <p:ph type="sldNum" sz="quarter" idx="5"/>
+          </p:nvPr>
+        </p:nvSpPr>
+        <p:spPr/>
+        <p:txBody>
+          <a:bodyPr/>
+          <a:lstStyle/>
+          <a:p>
+            <a:fld id="{D019A229-123F-41E7-81DB-A09700CC8DF9}" type="slidenum">
+              <a:rPr lang="en-CA" smtClean="0"/>
+              <a:t>2</a:t>
+            </a:fld>
+            <a:endParaRPr lang="en-CA"/>
+          </a:p>
+        </p:txBody>
+      </p:sp>
+    </p:spTree>
+    <p:extLst>
+      <p:ext uri="{BB962C8B-B14F-4D97-AF65-F5344CB8AC3E}">
+        <p14:creationId xmlns:p14="http://schemas.microsoft.com/office/powerpoint/2010/main" val="2900262756"/>
+      </p:ext>
+    </p:extLst>
+  </p:cSld>
+  <p:clrMapOvr>
+    <a:masterClrMapping/>
+  </p:clrMapOvr>
+</p:notes>
 </file>
 
 <file path=ppt/slideLayouts/slideLayout1.xml><?xml version="1.0" encoding="utf-8"?>
@@ -257,7 +703,7 @@
           <a:p>
             <a:fld id="{023DAACC-802D-41C7-9E2E-CB0B8FD3C71D}" type="datetimeFigureOut">
               <a:rPr lang="en-CA" smtClean="0"/>
-              <a:t>2026-06-22</a:t>
+              <a:t>2026-06-23</a:t>
             </a:fld>
             <a:endParaRPr lang="en-CA"/>
           </a:p>
@@ -457,7 +903,7 @@
           <a:p>
             <a:fld id="{023DAACC-802D-41C7-9E2E-CB0B8FD3C71D}" type="datetimeFigureOut">
               <a:rPr lang="en-CA" smtClean="0"/>
-              <a:t>2026-06-22</a:t>
+              <a:t>2026-06-23</a:t>
             </a:fld>
             <a:endParaRPr lang="en-CA"/>
           </a:p>
@@ -667,7 +1113,7 @@
           <a:p>
             <a:fld id="{023DAACC-802D-41C7-9E2E-CB0B8FD3C71D}" type="datetimeFigureOut">
               <a:rPr lang="en-CA" smtClean="0"/>
-              <a:t>2026-06-22</a:t>
+              <a:t>2026-06-23</a:t>
             </a:fld>
             <a:endParaRPr lang="en-CA"/>
           </a:p>
@@ -867,7 +1313,7 @@
           <a:p>
             <a:fld id="{023DAACC-802D-41C7-9E2E-CB0B8FD3C71D}" type="datetimeFigureOut">
               <a:rPr lang="en-CA" smtClean="0"/>
-              <a:t>2026-06-22</a:t>
+              <a:t>2026-06-23</a:t>
             </a:fld>
             <a:endParaRPr lang="en-CA"/>
           </a:p>
@@ -1143,7 +1589,7 @@
           <a:p>
             <a:fld id="{023DAACC-802D-41C7-9E2E-CB0B8FD3C71D}" type="datetimeFigureOut">
               <a:rPr lang="en-CA" smtClean="0"/>
-              <a:t>2026-06-22</a:t>
+              <a:t>2026-06-23</a:t>
             </a:fld>
             <a:endParaRPr lang="en-CA"/>
           </a:p>
@@ -1411,7 +1857,7 @@
           <a:p>
             <a:fld id="{023DAACC-802D-41C7-9E2E-CB0B8FD3C71D}" type="datetimeFigureOut">
               <a:rPr lang="en-CA" smtClean="0"/>
-              <a:t>2026-06-22</a:t>
+              <a:t>2026-06-23</a:t>
             </a:fld>
             <a:endParaRPr lang="en-CA"/>
           </a:p>
@@ -1826,7 +2272,7 @@
           <a:p>
             <a:fld id="{023DAACC-802D-41C7-9E2E-CB0B8FD3C71D}" type="datetimeFigureOut">
               <a:rPr lang="en-CA" smtClean="0"/>
-              <a:t>2026-06-22</a:t>
+              <a:t>2026-06-23</a:t>
             </a:fld>
             <a:endParaRPr lang="en-CA"/>
           </a:p>
@@ -1968,7 +2414,7 @@
           <a:p>
             <a:fld id="{023DAACC-802D-41C7-9E2E-CB0B8FD3C71D}" type="datetimeFigureOut">
               <a:rPr lang="en-CA" smtClean="0"/>
-              <a:t>2026-06-22</a:t>
+              <a:t>2026-06-23</a:t>
             </a:fld>
             <a:endParaRPr lang="en-CA"/>
           </a:p>
@@ -2081,7 +2527,7 @@
           <a:p>
             <a:fld id="{023DAACC-802D-41C7-9E2E-CB0B8FD3C71D}" type="datetimeFigureOut">
               <a:rPr lang="en-CA" smtClean="0"/>
-              <a:t>2026-06-22</a:t>
+              <a:t>2026-06-23</a:t>
             </a:fld>
             <a:endParaRPr lang="en-CA"/>
           </a:p>
@@ -2394,7 +2840,7 @@
           <a:p>
             <a:fld id="{023DAACC-802D-41C7-9E2E-CB0B8FD3C71D}" type="datetimeFigureOut">
               <a:rPr lang="en-CA" smtClean="0"/>
-              <a:t>2026-06-22</a:t>
+              <a:t>2026-06-23</a:t>
             </a:fld>
             <a:endParaRPr lang="en-CA"/>
           </a:p>
@@ -2683,7 +3129,7 @@
           <a:p>
             <a:fld id="{023DAACC-802D-41C7-9E2E-CB0B8FD3C71D}" type="datetimeFigureOut">
               <a:rPr lang="en-CA" smtClean="0"/>
-              <a:t>2026-06-22</a:t>
+              <a:t>2026-06-23</a:t>
             </a:fld>
             <a:endParaRPr lang="en-CA"/>
           </a:p>
@@ -2926,7 +3372,7 @@
           <a:p>
             <a:fld id="{023DAACC-802D-41C7-9E2E-CB0B8FD3C71D}" type="datetimeFigureOut">
               <a:rPr lang="en-CA" smtClean="0"/>
-              <a:t>2026-06-22</a:t>
+              <a:t>2026-06-23</a:t>
             </a:fld>
             <a:endParaRPr lang="en-CA"/>
           </a:p>
@@ -3438,7 +3884,7 @@
           <p:nvPr/>
         </p:nvPicPr>
         <p:blipFill>
-          <a:blip r:embed="rId2"/>
+          <a:blip r:embed="rId3"/>
           <a:stretch>
             <a:fillRect/>
           </a:stretch>
@@ -3468,7 +3914,7 @@
           <p:nvPr/>
         </p:nvPicPr>
         <p:blipFill>
-          <a:blip r:embed="rId3"/>
+          <a:blip r:embed="rId4"/>
           <a:stretch>
             <a:fillRect/>
           </a:stretch>
@@ -3653,8 +4099,8 @@
         </p:nvSpPr>
         <p:spPr>
           <a:xfrm flipH="1">
-            <a:off x="4686298" y="0"/>
-            <a:ext cx="5648323" cy="400050"/>
+            <a:off x="4686297" y="0"/>
+            <a:ext cx="5648323" cy="361009"/>
           </a:xfrm>
           <a:prstGeom prst="rect">
             <a:avLst/>
@@ -3918,10 +4364,1262 @@
           </a:p>
         </p:txBody>
       </p:sp>
+      <p:sp>
+        <p:nvSpPr>
+          <p:cNvPr id="8" name="TextBox 7">
+            <a:extLst>
+              <a:ext uri="{FF2B5EF4-FFF2-40B4-BE49-F238E27FC236}">
+                <a16:creationId xmlns:a16="http://schemas.microsoft.com/office/drawing/2014/main" id="{F1344AD1-2EB1-BABD-57F7-5C40FACDC61D}"/>
+              </a:ext>
+            </a:extLst>
+          </p:cNvPr>
+          <p:cNvSpPr txBox="1"/>
+          <p:nvPr/>
+        </p:nvSpPr>
+        <p:spPr>
+          <a:xfrm>
+            <a:off x="682898" y="4469367"/>
+            <a:ext cx="822325" cy="369332"/>
+          </a:xfrm>
+          <a:prstGeom prst="rect">
+            <a:avLst/>
+          </a:prstGeom>
+          <a:noFill/>
+        </p:spPr>
+        <p:txBody>
+          <a:bodyPr wrap="square" rtlCol="0">
+            <a:spAutoFit/>
+          </a:bodyPr>
+          <a:lstStyle/>
+          <a:p>
+            <a:r>
+              <a:rPr lang="en-CA" dirty="0">
+                <a:solidFill>
+                  <a:srgbClr val="FF0000"/>
+                </a:solidFill>
+              </a:rPr>
+              <a:t>19</a:t>
+            </a:r>
+          </a:p>
+        </p:txBody>
+      </p:sp>
+      <p:sp>
+        <p:nvSpPr>
+          <p:cNvPr id="10" name="TextBox 9">
+            <a:extLst>
+              <a:ext uri="{FF2B5EF4-FFF2-40B4-BE49-F238E27FC236}">
+                <a16:creationId xmlns:a16="http://schemas.microsoft.com/office/drawing/2014/main" id="{D8DC129C-72BE-D1A3-F09A-24644A0C8FE3}"/>
+              </a:ext>
+            </a:extLst>
+          </p:cNvPr>
+          <p:cNvSpPr txBox="1"/>
+          <p:nvPr/>
+        </p:nvSpPr>
+        <p:spPr>
+          <a:xfrm>
+            <a:off x="8540235" y="4328569"/>
+            <a:ext cx="822325" cy="369332"/>
+          </a:xfrm>
+          <a:prstGeom prst="rect">
+            <a:avLst/>
+          </a:prstGeom>
+          <a:noFill/>
+        </p:spPr>
+        <p:txBody>
+          <a:bodyPr wrap="square" rtlCol="0">
+            <a:spAutoFit/>
+          </a:bodyPr>
+          <a:lstStyle/>
+          <a:p>
+            <a:r>
+              <a:rPr lang="en-CA" dirty="0">
+                <a:solidFill>
+                  <a:srgbClr val="FF0000"/>
+                </a:solidFill>
+              </a:rPr>
+              <a:t>53</a:t>
+            </a:r>
+          </a:p>
+        </p:txBody>
+      </p:sp>
+      <p:sp>
+        <p:nvSpPr>
+          <p:cNvPr id="12" name="TextBox 11">
+            <a:extLst>
+              <a:ext uri="{FF2B5EF4-FFF2-40B4-BE49-F238E27FC236}">
+                <a16:creationId xmlns:a16="http://schemas.microsoft.com/office/drawing/2014/main" id="{D7F05189-7BB6-D2EB-CC2C-9AFA5922BCF1}"/>
+              </a:ext>
+            </a:extLst>
+          </p:cNvPr>
+          <p:cNvSpPr txBox="1"/>
+          <p:nvPr/>
+        </p:nvSpPr>
+        <p:spPr>
+          <a:xfrm>
+            <a:off x="8362693" y="4581470"/>
+            <a:ext cx="822325" cy="369332"/>
+          </a:xfrm>
+          <a:prstGeom prst="rect">
+            <a:avLst/>
+          </a:prstGeom>
+          <a:noFill/>
+        </p:spPr>
+        <p:txBody>
+          <a:bodyPr wrap="square" rtlCol="0">
+            <a:spAutoFit/>
+          </a:bodyPr>
+          <a:lstStyle/>
+          <a:p>
+            <a:r>
+              <a:rPr lang="en-CA" dirty="0">
+                <a:solidFill>
+                  <a:srgbClr val="FF0000"/>
+                </a:solidFill>
+              </a:rPr>
+              <a:t>41</a:t>
+            </a:r>
+          </a:p>
+        </p:txBody>
+      </p:sp>
+      <p:sp>
+        <p:nvSpPr>
+          <p:cNvPr id="15" name="TextBox 14">
+            <a:extLst>
+              <a:ext uri="{FF2B5EF4-FFF2-40B4-BE49-F238E27FC236}">
+                <a16:creationId xmlns:a16="http://schemas.microsoft.com/office/drawing/2014/main" id="{CF349408-8108-3289-BB06-5D5042AE428D}"/>
+              </a:ext>
+            </a:extLst>
+          </p:cNvPr>
+          <p:cNvSpPr txBox="1"/>
+          <p:nvPr/>
+        </p:nvSpPr>
+        <p:spPr>
+          <a:xfrm>
+            <a:off x="9340593" y="4605189"/>
+            <a:ext cx="822325" cy="369332"/>
+          </a:xfrm>
+          <a:prstGeom prst="rect">
+            <a:avLst/>
+          </a:prstGeom>
+          <a:noFill/>
+        </p:spPr>
+        <p:txBody>
+          <a:bodyPr wrap="square" rtlCol="0">
+            <a:spAutoFit/>
+          </a:bodyPr>
+          <a:lstStyle/>
+          <a:p>
+            <a:r>
+              <a:rPr lang="en-CA" dirty="0">
+                <a:solidFill>
+                  <a:srgbClr val="FF0000"/>
+                </a:solidFill>
+              </a:rPr>
+              <a:t>16</a:t>
+            </a:r>
+          </a:p>
+        </p:txBody>
+      </p:sp>
+      <p:sp>
+        <p:nvSpPr>
+          <p:cNvPr id="19" name="TextBox 18">
+            <a:extLst>
+              <a:ext uri="{FF2B5EF4-FFF2-40B4-BE49-F238E27FC236}">
+                <a16:creationId xmlns:a16="http://schemas.microsoft.com/office/drawing/2014/main" id="{22735032-6622-CE1B-A4BC-49735E8A61C3}"/>
+              </a:ext>
+            </a:extLst>
+          </p:cNvPr>
+          <p:cNvSpPr txBox="1"/>
+          <p:nvPr/>
+        </p:nvSpPr>
+        <p:spPr>
+          <a:xfrm>
+            <a:off x="3503612" y="7482959"/>
+            <a:ext cx="822325" cy="369332"/>
+          </a:xfrm>
+          <a:prstGeom prst="rect">
+            <a:avLst/>
+          </a:prstGeom>
+          <a:noFill/>
+        </p:spPr>
+        <p:txBody>
+          <a:bodyPr wrap="square" rtlCol="0">
+            <a:spAutoFit/>
+          </a:bodyPr>
+          <a:lstStyle/>
+          <a:p>
+            <a:r>
+              <a:rPr lang="en-CA" dirty="0">
+                <a:solidFill>
+                  <a:srgbClr val="FF0000"/>
+                </a:solidFill>
+              </a:rPr>
+              <a:t>38</a:t>
+            </a:r>
+          </a:p>
+        </p:txBody>
+      </p:sp>
+      <p:sp>
+        <p:nvSpPr>
+          <p:cNvPr id="21" name="TextBox 20">
+            <a:extLst>
+              <a:ext uri="{FF2B5EF4-FFF2-40B4-BE49-F238E27FC236}">
+                <a16:creationId xmlns:a16="http://schemas.microsoft.com/office/drawing/2014/main" id="{BE36B33C-B38D-24CA-1930-0892289DDEBE}"/>
+              </a:ext>
+            </a:extLst>
+          </p:cNvPr>
+          <p:cNvSpPr txBox="1"/>
+          <p:nvPr/>
+        </p:nvSpPr>
+        <p:spPr>
+          <a:xfrm>
+            <a:off x="-27736" y="1661635"/>
+            <a:ext cx="822325" cy="369332"/>
+          </a:xfrm>
+          <a:prstGeom prst="rect">
+            <a:avLst/>
+          </a:prstGeom>
+          <a:noFill/>
+        </p:spPr>
+        <p:txBody>
+          <a:bodyPr wrap="square" rtlCol="0">
+            <a:spAutoFit/>
+          </a:bodyPr>
+          <a:lstStyle/>
+          <a:p>
+            <a:r>
+              <a:rPr lang="en-CA" dirty="0">
+                <a:solidFill>
+                  <a:srgbClr val="FF0000"/>
+                </a:solidFill>
+              </a:rPr>
+              <a:t>100</a:t>
+            </a:r>
+          </a:p>
+        </p:txBody>
+      </p:sp>
+      <p:sp>
+        <p:nvSpPr>
+          <p:cNvPr id="24" name="TextBox 23">
+            <a:extLst>
+              <a:ext uri="{FF2B5EF4-FFF2-40B4-BE49-F238E27FC236}">
+                <a16:creationId xmlns:a16="http://schemas.microsoft.com/office/drawing/2014/main" id="{10584DA3-A6F7-4DA6-1CCC-E8D479B4E244}"/>
+              </a:ext>
+            </a:extLst>
+          </p:cNvPr>
+          <p:cNvSpPr txBox="1"/>
+          <p:nvPr/>
+        </p:nvSpPr>
+        <p:spPr>
+          <a:xfrm>
+            <a:off x="373335" y="1894094"/>
+            <a:ext cx="822325" cy="369332"/>
+          </a:xfrm>
+          <a:prstGeom prst="rect">
+            <a:avLst/>
+          </a:prstGeom>
+          <a:noFill/>
+        </p:spPr>
+        <p:txBody>
+          <a:bodyPr wrap="square" rtlCol="0">
+            <a:spAutoFit/>
+          </a:bodyPr>
+          <a:lstStyle/>
+          <a:p>
+            <a:r>
+              <a:rPr lang="en-CA" dirty="0">
+                <a:solidFill>
+                  <a:srgbClr val="FF0000"/>
+                </a:solidFill>
+              </a:rPr>
+              <a:t>61</a:t>
+            </a:r>
+          </a:p>
+        </p:txBody>
+      </p:sp>
+      <p:sp>
+        <p:nvSpPr>
+          <p:cNvPr id="27" name="TextBox 26">
+            <a:extLst>
+              <a:ext uri="{FF2B5EF4-FFF2-40B4-BE49-F238E27FC236}">
+                <a16:creationId xmlns:a16="http://schemas.microsoft.com/office/drawing/2014/main" id="{A0EA7C5A-5845-25D6-97B9-460C3291FD25}"/>
+              </a:ext>
+            </a:extLst>
+          </p:cNvPr>
+          <p:cNvSpPr txBox="1"/>
+          <p:nvPr/>
+        </p:nvSpPr>
+        <p:spPr>
+          <a:xfrm>
+            <a:off x="969991" y="1635202"/>
+            <a:ext cx="822325" cy="369332"/>
+          </a:xfrm>
+          <a:prstGeom prst="rect">
+            <a:avLst/>
+          </a:prstGeom>
+          <a:noFill/>
+        </p:spPr>
+        <p:txBody>
+          <a:bodyPr wrap="square" rtlCol="0">
+            <a:spAutoFit/>
+          </a:bodyPr>
+          <a:lstStyle/>
+          <a:p>
+            <a:r>
+              <a:rPr lang="en-CA" dirty="0">
+                <a:solidFill>
+                  <a:srgbClr val="FF0000"/>
+                </a:solidFill>
+              </a:rPr>
+              <a:t>39</a:t>
+            </a:r>
+          </a:p>
+        </p:txBody>
+      </p:sp>
+      <p:sp>
+        <p:nvSpPr>
+          <p:cNvPr id="30" name="TextBox 29">
+            <a:extLst>
+              <a:ext uri="{FF2B5EF4-FFF2-40B4-BE49-F238E27FC236}">
+                <a16:creationId xmlns:a16="http://schemas.microsoft.com/office/drawing/2014/main" id="{24FF98A5-914E-AB20-A98C-74DEC17CA505}"/>
+              </a:ext>
+            </a:extLst>
+          </p:cNvPr>
+          <p:cNvSpPr txBox="1"/>
+          <p:nvPr/>
+        </p:nvSpPr>
+        <p:spPr>
+          <a:xfrm>
+            <a:off x="1866776" y="1734828"/>
+            <a:ext cx="822325" cy="369332"/>
+          </a:xfrm>
+          <a:prstGeom prst="rect">
+            <a:avLst/>
+          </a:prstGeom>
+          <a:noFill/>
+        </p:spPr>
+        <p:txBody>
+          <a:bodyPr wrap="square" rtlCol="0">
+            <a:spAutoFit/>
+          </a:bodyPr>
+          <a:lstStyle/>
+          <a:p>
+            <a:r>
+              <a:rPr lang="en-CA" dirty="0">
+                <a:solidFill>
+                  <a:srgbClr val="FF0000"/>
+                </a:solidFill>
+              </a:rPr>
+              <a:t>14</a:t>
+            </a:r>
+          </a:p>
+        </p:txBody>
+      </p:sp>
+      <p:sp>
+        <p:nvSpPr>
+          <p:cNvPr id="35" name="TextBox 34">
+            <a:extLst>
+              <a:ext uri="{FF2B5EF4-FFF2-40B4-BE49-F238E27FC236}">
+                <a16:creationId xmlns:a16="http://schemas.microsoft.com/office/drawing/2014/main" id="{1220E5F7-50E6-5F3B-E794-3EBC8832EC2E}"/>
+              </a:ext>
+            </a:extLst>
+          </p:cNvPr>
+          <p:cNvSpPr txBox="1"/>
+          <p:nvPr/>
+        </p:nvSpPr>
+        <p:spPr>
+          <a:xfrm>
+            <a:off x="4743475" y="-8323"/>
+            <a:ext cx="822325" cy="369332"/>
+          </a:xfrm>
+          <a:prstGeom prst="rect">
+            <a:avLst/>
+          </a:prstGeom>
+          <a:noFill/>
+        </p:spPr>
+        <p:txBody>
+          <a:bodyPr wrap="square" rtlCol="0">
+            <a:spAutoFit/>
+          </a:bodyPr>
+          <a:lstStyle/>
+          <a:p>
+            <a:r>
+              <a:rPr lang="en-CA" dirty="0">
+                <a:solidFill>
+                  <a:srgbClr val="FF0000"/>
+                </a:solidFill>
+              </a:rPr>
+              <a:t>23</a:t>
+            </a:r>
+          </a:p>
+        </p:txBody>
+      </p:sp>
+      <p:sp>
+        <p:nvSpPr>
+          <p:cNvPr id="37" name="TextBox 36">
+            <a:extLst>
+              <a:ext uri="{FF2B5EF4-FFF2-40B4-BE49-F238E27FC236}">
+                <a16:creationId xmlns:a16="http://schemas.microsoft.com/office/drawing/2014/main" id="{B8E0578E-21ED-6F57-355F-BA46075BF778}"/>
+              </a:ext>
+            </a:extLst>
+          </p:cNvPr>
+          <p:cNvSpPr txBox="1"/>
+          <p:nvPr/>
+        </p:nvSpPr>
+        <p:spPr>
+          <a:xfrm>
+            <a:off x="5517123" y="62984"/>
+            <a:ext cx="822325" cy="369332"/>
+          </a:xfrm>
+          <a:prstGeom prst="rect">
+            <a:avLst/>
+          </a:prstGeom>
+          <a:noFill/>
+        </p:spPr>
+        <p:txBody>
+          <a:bodyPr wrap="square" rtlCol="0">
+            <a:spAutoFit/>
+          </a:bodyPr>
+          <a:lstStyle/>
+          <a:p>
+            <a:r>
+              <a:rPr lang="en-CA" dirty="0">
+                <a:solidFill>
+                  <a:srgbClr val="FF0000"/>
+                </a:solidFill>
+              </a:rPr>
+              <a:t>10</a:t>
+            </a:r>
+          </a:p>
+        </p:txBody>
+      </p:sp>
     </p:spTree>
     <p:extLst>
       <p:ext uri="{BB962C8B-B14F-4D97-AF65-F5344CB8AC3E}">
         <p14:creationId xmlns:p14="http://schemas.microsoft.com/office/powerpoint/2010/main" val="3614902900"/>
+      </p:ext>
+    </p:extLst>
+  </p:cSld>
+  <p:clrMapOvr>
+    <a:masterClrMapping/>
+  </p:clrMapOvr>
+</p:sld>
+</file>
+
+<file path=ppt/slides/slide3.xml><?xml version="1.0" encoding="utf-8"?>
+<p:sld xmlns:a="http://schemas.openxmlformats.org/drawingml/2006/main" xmlns:r="http://schemas.openxmlformats.org/officeDocument/2006/relationships" xmlns:p="http://schemas.openxmlformats.org/presentationml/2006/main">
+  <p:cSld>
+    <p:spTree>
+      <p:nvGrpSpPr>
+        <p:cNvPr id="1" name=""/>
+        <p:cNvGrpSpPr/>
+        <p:nvPr/>
+      </p:nvGrpSpPr>
+      <p:grpSpPr>
+        <a:xfrm>
+          <a:off x="0" y="0"/>
+          <a:ext cx="0" cy="0"/>
+          <a:chOff x="0" y="0"/>
+          <a:chExt cx="0" cy="0"/>
+        </a:xfrm>
+      </p:grpSpPr>
+      <p:pic>
+        <p:nvPicPr>
+          <p:cNvPr id="3" name="Picture 2">
+            <a:extLst>
+              <a:ext uri="{FF2B5EF4-FFF2-40B4-BE49-F238E27FC236}">
+                <a16:creationId xmlns:a16="http://schemas.microsoft.com/office/drawing/2014/main" id="{0933E2F5-6539-89FA-C3F4-F76487C326D5}"/>
+              </a:ext>
+            </a:extLst>
+          </p:cNvPr>
+          <p:cNvPicPr>
+            <a:picLocks noChangeAspect="1"/>
+          </p:cNvPicPr>
+          <p:nvPr/>
+        </p:nvPicPr>
+        <p:blipFill>
+          <a:blip r:embed="rId2"/>
+          <a:stretch>
+            <a:fillRect/>
+          </a:stretch>
+        </p:blipFill>
+        <p:spPr>
+          <a:xfrm>
+            <a:off x="1101176" y="389671"/>
+            <a:ext cx="4163006" cy="5887272"/>
+          </a:xfrm>
+          <a:prstGeom prst="rect">
+            <a:avLst/>
+          </a:prstGeom>
+        </p:spPr>
+      </p:pic>
+      <p:pic>
+        <p:nvPicPr>
+          <p:cNvPr id="5" name="Picture 4">
+            <a:extLst>
+              <a:ext uri="{FF2B5EF4-FFF2-40B4-BE49-F238E27FC236}">
+                <a16:creationId xmlns:a16="http://schemas.microsoft.com/office/drawing/2014/main" id="{7BD95CE0-4A02-4F24-4261-E5293EA69391}"/>
+              </a:ext>
+            </a:extLst>
+          </p:cNvPr>
+          <p:cNvPicPr>
+            <a:picLocks noChangeAspect="1"/>
+          </p:cNvPicPr>
+          <p:nvPr/>
+        </p:nvPicPr>
+        <p:blipFill>
+          <a:blip r:embed="rId3"/>
+          <a:stretch>
+            <a:fillRect/>
+          </a:stretch>
+        </p:blipFill>
+        <p:spPr>
+          <a:xfrm>
+            <a:off x="7291721" y="389671"/>
+            <a:ext cx="4753638" cy="5496692"/>
+          </a:xfrm>
+          <a:prstGeom prst="rect">
+            <a:avLst/>
+          </a:prstGeom>
+        </p:spPr>
+      </p:pic>
+    </p:spTree>
+    <p:extLst>
+      <p:ext uri="{BB962C8B-B14F-4D97-AF65-F5344CB8AC3E}">
+        <p14:creationId xmlns:p14="http://schemas.microsoft.com/office/powerpoint/2010/main" val="414115650"/>
+      </p:ext>
+    </p:extLst>
+  </p:cSld>
+  <p:clrMapOvr>
+    <a:masterClrMapping/>
+  </p:clrMapOvr>
+</p:sld>
+</file>
+
+<file path=ppt/slides/slide4.xml><?xml version="1.0" encoding="utf-8"?>
+<p:sld xmlns:a="http://schemas.openxmlformats.org/drawingml/2006/main" xmlns:r="http://schemas.openxmlformats.org/officeDocument/2006/relationships" xmlns:p="http://schemas.openxmlformats.org/presentationml/2006/main">
+  <p:cSld>
+    <p:spTree>
+      <p:nvGrpSpPr>
+        <p:cNvPr id="1" name=""/>
+        <p:cNvGrpSpPr/>
+        <p:nvPr/>
+      </p:nvGrpSpPr>
+      <p:grpSpPr>
+        <a:xfrm>
+          <a:off x="0" y="0"/>
+          <a:ext cx="0" cy="0"/>
+          <a:chOff x="0" y="0"/>
+          <a:chExt cx="0" cy="0"/>
+        </a:xfrm>
+      </p:grpSpPr>
+      <p:pic>
+        <p:nvPicPr>
+          <p:cNvPr id="3" name="Picture 2">
+            <a:extLst>
+              <a:ext uri="{FF2B5EF4-FFF2-40B4-BE49-F238E27FC236}">
+                <a16:creationId xmlns:a16="http://schemas.microsoft.com/office/drawing/2014/main" id="{981E25A7-F710-4061-87E5-76F63444ADD3}"/>
+              </a:ext>
+            </a:extLst>
+          </p:cNvPr>
+          <p:cNvPicPr>
+            <a:picLocks noChangeAspect="1"/>
+          </p:cNvPicPr>
+          <p:nvPr/>
+        </p:nvPicPr>
+        <p:blipFill>
+          <a:blip r:embed="rId2"/>
+          <a:stretch>
+            <a:fillRect/>
+          </a:stretch>
+        </p:blipFill>
+        <p:spPr>
+          <a:xfrm>
+            <a:off x="1013651" y="0"/>
+            <a:ext cx="10164698" cy="6858000"/>
+          </a:xfrm>
+          <a:prstGeom prst="rect">
+            <a:avLst/>
+          </a:prstGeom>
+        </p:spPr>
+      </p:pic>
+      <p:pic>
+        <p:nvPicPr>
+          <p:cNvPr id="5" name="Picture 4">
+            <a:extLst>
+              <a:ext uri="{FF2B5EF4-FFF2-40B4-BE49-F238E27FC236}">
+                <a16:creationId xmlns:a16="http://schemas.microsoft.com/office/drawing/2014/main" id="{50999B76-C765-8A00-0152-868EE6DB793E}"/>
+              </a:ext>
+            </a:extLst>
+          </p:cNvPr>
+          <p:cNvPicPr>
+            <a:picLocks noChangeAspect="1"/>
+          </p:cNvPicPr>
+          <p:nvPr/>
+        </p:nvPicPr>
+        <p:blipFill>
+          <a:blip r:embed="rId3"/>
+          <a:stretch>
+            <a:fillRect/>
+          </a:stretch>
+        </p:blipFill>
+        <p:spPr>
+          <a:xfrm>
+            <a:off x="-7284886" y="-241606"/>
+            <a:ext cx="9983593" cy="2248214"/>
+          </a:xfrm>
+          <a:prstGeom prst="rect">
+            <a:avLst/>
+          </a:prstGeom>
+        </p:spPr>
+      </p:pic>
+      <p:pic>
+        <p:nvPicPr>
+          <p:cNvPr id="7" name="Picture 6">
+            <a:extLst>
+              <a:ext uri="{FF2B5EF4-FFF2-40B4-BE49-F238E27FC236}">
+                <a16:creationId xmlns:a16="http://schemas.microsoft.com/office/drawing/2014/main" id="{D067671B-56DE-5814-4CA0-EDC1123C9BBA}"/>
+              </a:ext>
+            </a:extLst>
+          </p:cNvPr>
+          <p:cNvPicPr>
+            <a:picLocks noChangeAspect="1"/>
+          </p:cNvPicPr>
+          <p:nvPr/>
+        </p:nvPicPr>
+        <p:blipFill>
+          <a:blip r:embed="rId4"/>
+          <a:stretch>
+            <a:fillRect/>
+          </a:stretch>
+        </p:blipFill>
+        <p:spPr>
+          <a:xfrm>
+            <a:off x="-8582057" y="3543581"/>
+            <a:ext cx="8973802" cy="3896269"/>
+          </a:xfrm>
+          <a:prstGeom prst="rect">
+            <a:avLst/>
+          </a:prstGeom>
+        </p:spPr>
+      </p:pic>
+    </p:spTree>
+    <p:extLst>
+      <p:ext uri="{BB962C8B-B14F-4D97-AF65-F5344CB8AC3E}">
+        <p14:creationId xmlns:p14="http://schemas.microsoft.com/office/powerpoint/2010/main" val="2683204285"/>
+      </p:ext>
+    </p:extLst>
+  </p:cSld>
+  <p:clrMapOvr>
+    <a:masterClrMapping/>
+  </p:clrMapOvr>
+</p:sld>
+</file>
+
+<file path=ppt/slides/slide5.xml><?xml version="1.0" encoding="utf-8"?>
+<p:sld xmlns:a="http://schemas.openxmlformats.org/drawingml/2006/main" xmlns:r="http://schemas.openxmlformats.org/officeDocument/2006/relationships" xmlns:p="http://schemas.openxmlformats.org/presentationml/2006/main">
+  <p:cSld>
+    <p:spTree>
+      <p:nvGrpSpPr>
+        <p:cNvPr id="1" name=""/>
+        <p:cNvGrpSpPr/>
+        <p:nvPr/>
+      </p:nvGrpSpPr>
+      <p:grpSpPr>
+        <a:xfrm>
+          <a:off x="0" y="0"/>
+          <a:ext cx="0" cy="0"/>
+          <a:chOff x="0" y="0"/>
+          <a:chExt cx="0" cy="0"/>
+        </a:xfrm>
+      </p:grpSpPr>
+      <p:pic>
+        <p:nvPicPr>
+          <p:cNvPr id="17" name="Picture 16">
+            <a:extLst>
+              <a:ext uri="{FF2B5EF4-FFF2-40B4-BE49-F238E27FC236}">
+                <a16:creationId xmlns:a16="http://schemas.microsoft.com/office/drawing/2014/main" id="{F1395AE4-BDFA-4E2B-7782-BA5647FA297F}"/>
+              </a:ext>
+            </a:extLst>
+          </p:cNvPr>
+          <p:cNvPicPr>
+            <a:picLocks noChangeAspect="1"/>
+          </p:cNvPicPr>
+          <p:nvPr/>
+        </p:nvPicPr>
+        <p:blipFill>
+          <a:blip r:embed="rId2">
+            <a:extLst>
+              <a:ext uri="{28A0092B-C50C-407E-A947-70E740481C1C}">
+                <a14:useLocalDpi xmlns:a14="http://schemas.microsoft.com/office/drawing/2010/main" val="0"/>
+              </a:ext>
+            </a:extLst>
+          </a:blip>
+          <a:stretch>
+            <a:fillRect/>
+          </a:stretch>
+        </p:blipFill>
+        <p:spPr>
+          <a:xfrm>
+            <a:off x="413980" y="0"/>
+            <a:ext cx="11883382" cy="6858000"/>
+          </a:xfrm>
+          <a:prstGeom prst="rect">
+            <a:avLst/>
+          </a:prstGeom>
+        </p:spPr>
+      </p:pic>
+      <p:sp>
+        <p:nvSpPr>
+          <p:cNvPr id="22" name="TextBox 21">
+            <a:extLst>
+              <a:ext uri="{FF2B5EF4-FFF2-40B4-BE49-F238E27FC236}">
+                <a16:creationId xmlns:a16="http://schemas.microsoft.com/office/drawing/2014/main" id="{B645A1FA-380C-401E-8E70-C6185C3A797E}"/>
+              </a:ext>
+            </a:extLst>
+          </p:cNvPr>
+          <p:cNvSpPr txBox="1"/>
+          <p:nvPr/>
+        </p:nvSpPr>
+        <p:spPr>
+          <a:xfrm>
+            <a:off x="2395180" y="495300"/>
+            <a:ext cx="481370" cy="307777"/>
+          </a:xfrm>
+          <a:prstGeom prst="rect">
+            <a:avLst/>
+          </a:prstGeom>
+          <a:noFill/>
+        </p:spPr>
+        <p:txBody>
+          <a:bodyPr wrap="square" rtlCol="0">
+            <a:spAutoFit/>
+          </a:bodyPr>
+          <a:lstStyle/>
+          <a:p>
+            <a:r>
+              <a:rPr lang="en-CA" sz="1400" dirty="0">
+                <a:solidFill>
+                  <a:srgbClr val="FF0000"/>
+                </a:solidFill>
+              </a:rPr>
+              <a:t>97</a:t>
+            </a:r>
+          </a:p>
+        </p:txBody>
+      </p:sp>
+      <p:sp>
+        <p:nvSpPr>
+          <p:cNvPr id="24" name="TextBox 23">
+            <a:extLst>
+              <a:ext uri="{FF2B5EF4-FFF2-40B4-BE49-F238E27FC236}">
+                <a16:creationId xmlns:a16="http://schemas.microsoft.com/office/drawing/2014/main" id="{BA624179-4C37-EF34-BB06-5493CA05E56D}"/>
+              </a:ext>
+            </a:extLst>
+          </p:cNvPr>
+          <p:cNvSpPr txBox="1"/>
+          <p:nvPr/>
+        </p:nvSpPr>
+        <p:spPr>
+          <a:xfrm>
+            <a:off x="4852630" y="506313"/>
+            <a:ext cx="481370" cy="307777"/>
+          </a:xfrm>
+          <a:prstGeom prst="rect">
+            <a:avLst/>
+          </a:prstGeom>
+          <a:noFill/>
+        </p:spPr>
+        <p:txBody>
+          <a:bodyPr wrap="square" rtlCol="0">
+            <a:spAutoFit/>
+          </a:bodyPr>
+          <a:lstStyle/>
+          <a:p>
+            <a:r>
+              <a:rPr lang="en-CA" sz="1400" dirty="0">
+                <a:solidFill>
+                  <a:srgbClr val="FF0000"/>
+                </a:solidFill>
+              </a:rPr>
+              <a:t>100</a:t>
+            </a:r>
+          </a:p>
+        </p:txBody>
+      </p:sp>
+      <p:sp>
+        <p:nvSpPr>
+          <p:cNvPr id="26" name="TextBox 25">
+            <a:extLst>
+              <a:ext uri="{FF2B5EF4-FFF2-40B4-BE49-F238E27FC236}">
+                <a16:creationId xmlns:a16="http://schemas.microsoft.com/office/drawing/2014/main" id="{A742B3BD-C092-2D10-A5CC-9A89BC0A6B8B}"/>
+              </a:ext>
+            </a:extLst>
+          </p:cNvPr>
+          <p:cNvSpPr txBox="1"/>
+          <p:nvPr/>
+        </p:nvSpPr>
+        <p:spPr>
+          <a:xfrm>
+            <a:off x="5701519" y="509289"/>
+            <a:ext cx="481370" cy="307777"/>
+          </a:xfrm>
+          <a:prstGeom prst="rect">
+            <a:avLst/>
+          </a:prstGeom>
+          <a:noFill/>
+        </p:spPr>
+        <p:txBody>
+          <a:bodyPr wrap="square" rtlCol="0">
+            <a:spAutoFit/>
+          </a:bodyPr>
+          <a:lstStyle/>
+          <a:p>
+            <a:r>
+              <a:rPr lang="en-CA" sz="1400" dirty="0">
+                <a:solidFill>
+                  <a:srgbClr val="FF0000"/>
+                </a:solidFill>
+              </a:rPr>
+              <a:t>92</a:t>
+            </a:r>
+          </a:p>
+        </p:txBody>
+      </p:sp>
+      <p:sp>
+        <p:nvSpPr>
+          <p:cNvPr id="28" name="TextBox 27">
+            <a:extLst>
+              <a:ext uri="{FF2B5EF4-FFF2-40B4-BE49-F238E27FC236}">
+                <a16:creationId xmlns:a16="http://schemas.microsoft.com/office/drawing/2014/main" id="{3564EF97-47B1-BA95-BDB4-1A5C162B81DD}"/>
+              </a:ext>
+            </a:extLst>
+          </p:cNvPr>
+          <p:cNvSpPr txBox="1"/>
+          <p:nvPr/>
+        </p:nvSpPr>
+        <p:spPr>
+          <a:xfrm>
+            <a:off x="4060186" y="506313"/>
+            <a:ext cx="481370" cy="307777"/>
+          </a:xfrm>
+          <a:prstGeom prst="rect">
+            <a:avLst/>
+          </a:prstGeom>
+          <a:noFill/>
+        </p:spPr>
+        <p:txBody>
+          <a:bodyPr wrap="square" rtlCol="0">
+            <a:spAutoFit/>
+          </a:bodyPr>
+          <a:lstStyle/>
+          <a:p>
+            <a:r>
+              <a:rPr lang="en-CA" sz="1400" dirty="0">
+                <a:solidFill>
+                  <a:srgbClr val="FF0000"/>
+                </a:solidFill>
+              </a:rPr>
+              <a:t>94</a:t>
+            </a:r>
+          </a:p>
+        </p:txBody>
+      </p:sp>
+      <p:sp>
+        <p:nvSpPr>
+          <p:cNvPr id="30" name="TextBox 29">
+            <a:extLst>
+              <a:ext uri="{FF2B5EF4-FFF2-40B4-BE49-F238E27FC236}">
+                <a16:creationId xmlns:a16="http://schemas.microsoft.com/office/drawing/2014/main" id="{AB93EAF4-471A-B10C-E1C9-03795F2F4C8F}"/>
+              </a:ext>
+            </a:extLst>
+          </p:cNvPr>
+          <p:cNvSpPr txBox="1"/>
+          <p:nvPr/>
+        </p:nvSpPr>
+        <p:spPr>
+          <a:xfrm>
+            <a:off x="10722358" y="506313"/>
+            <a:ext cx="481370" cy="307777"/>
+          </a:xfrm>
+          <a:prstGeom prst="rect">
+            <a:avLst/>
+          </a:prstGeom>
+          <a:noFill/>
+        </p:spPr>
+        <p:txBody>
+          <a:bodyPr wrap="square" rtlCol="0">
+            <a:spAutoFit/>
+          </a:bodyPr>
+          <a:lstStyle/>
+          <a:p>
+            <a:r>
+              <a:rPr lang="en-CA" sz="1400" dirty="0">
+                <a:solidFill>
+                  <a:srgbClr val="FF0000"/>
+                </a:solidFill>
+              </a:rPr>
+              <a:t>6</a:t>
+            </a:r>
+          </a:p>
+        </p:txBody>
+      </p:sp>
+      <p:sp>
+        <p:nvSpPr>
+          <p:cNvPr id="32" name="TextBox 31">
+            <a:extLst>
+              <a:ext uri="{FF2B5EF4-FFF2-40B4-BE49-F238E27FC236}">
+                <a16:creationId xmlns:a16="http://schemas.microsoft.com/office/drawing/2014/main" id="{D46BECE1-46B7-13C3-393C-916CF8846D9E}"/>
+              </a:ext>
+            </a:extLst>
+          </p:cNvPr>
+          <p:cNvSpPr txBox="1"/>
+          <p:nvPr/>
+        </p:nvSpPr>
+        <p:spPr>
+          <a:xfrm>
+            <a:off x="9844189" y="495299"/>
+            <a:ext cx="481370" cy="307777"/>
+          </a:xfrm>
+          <a:prstGeom prst="rect">
+            <a:avLst/>
+          </a:prstGeom>
+          <a:noFill/>
+        </p:spPr>
+        <p:txBody>
+          <a:bodyPr wrap="square" rtlCol="0">
+            <a:spAutoFit/>
+          </a:bodyPr>
+          <a:lstStyle/>
+          <a:p>
+            <a:r>
+              <a:rPr lang="en-CA" sz="1400" dirty="0">
+                <a:solidFill>
+                  <a:srgbClr val="FF0000"/>
+                </a:solidFill>
+              </a:rPr>
+              <a:t>50</a:t>
+            </a:r>
+          </a:p>
+        </p:txBody>
+      </p:sp>
+      <p:sp>
+        <p:nvSpPr>
+          <p:cNvPr id="34" name="TextBox 33">
+            <a:extLst>
+              <a:ext uri="{FF2B5EF4-FFF2-40B4-BE49-F238E27FC236}">
+                <a16:creationId xmlns:a16="http://schemas.microsoft.com/office/drawing/2014/main" id="{4CB7DC6D-6AB4-67B5-CA57-67ED3BFF89AA}"/>
+              </a:ext>
+            </a:extLst>
+          </p:cNvPr>
+          <p:cNvSpPr txBox="1"/>
+          <p:nvPr/>
+        </p:nvSpPr>
+        <p:spPr>
+          <a:xfrm>
+            <a:off x="8238509" y="506313"/>
+            <a:ext cx="481370" cy="307777"/>
+          </a:xfrm>
+          <a:prstGeom prst="rect">
+            <a:avLst/>
+          </a:prstGeom>
+          <a:noFill/>
+        </p:spPr>
+        <p:txBody>
+          <a:bodyPr wrap="square" rtlCol="0">
+            <a:spAutoFit/>
+          </a:bodyPr>
+          <a:lstStyle/>
+          <a:p>
+            <a:r>
+              <a:rPr lang="en-CA" sz="1400" dirty="0">
+                <a:solidFill>
+                  <a:srgbClr val="FF0000"/>
+                </a:solidFill>
+              </a:rPr>
+              <a:t>50</a:t>
+            </a:r>
+          </a:p>
+        </p:txBody>
+      </p:sp>
+      <p:sp>
+        <p:nvSpPr>
+          <p:cNvPr id="36" name="TextBox 35">
+            <a:extLst>
+              <a:ext uri="{FF2B5EF4-FFF2-40B4-BE49-F238E27FC236}">
+                <a16:creationId xmlns:a16="http://schemas.microsoft.com/office/drawing/2014/main" id="{89BCBD52-2E5D-BCE4-9F07-68EBCE209D63}"/>
+              </a:ext>
+            </a:extLst>
+          </p:cNvPr>
+          <p:cNvSpPr txBox="1"/>
+          <p:nvPr/>
+        </p:nvSpPr>
+        <p:spPr>
+          <a:xfrm>
+            <a:off x="9041349" y="495298"/>
+            <a:ext cx="481370" cy="307777"/>
+          </a:xfrm>
+          <a:prstGeom prst="rect">
+            <a:avLst/>
+          </a:prstGeom>
+          <a:noFill/>
+        </p:spPr>
+        <p:txBody>
+          <a:bodyPr wrap="square" rtlCol="0">
+            <a:spAutoFit/>
+          </a:bodyPr>
+          <a:lstStyle/>
+          <a:p>
+            <a:r>
+              <a:rPr lang="en-CA" sz="1400" dirty="0">
+                <a:solidFill>
+                  <a:srgbClr val="FF0000"/>
+                </a:solidFill>
+              </a:rPr>
+              <a:t>47</a:t>
+            </a:r>
+          </a:p>
+        </p:txBody>
+      </p:sp>
+      <p:sp>
+        <p:nvSpPr>
+          <p:cNvPr id="38" name="TextBox 37">
+            <a:extLst>
+              <a:ext uri="{FF2B5EF4-FFF2-40B4-BE49-F238E27FC236}">
+                <a16:creationId xmlns:a16="http://schemas.microsoft.com/office/drawing/2014/main" id="{C23435FC-3606-8D48-6E8F-99C887D98952}"/>
+              </a:ext>
+            </a:extLst>
+          </p:cNvPr>
+          <p:cNvSpPr txBox="1"/>
+          <p:nvPr/>
+        </p:nvSpPr>
+        <p:spPr>
+          <a:xfrm>
+            <a:off x="7326291" y="507799"/>
+            <a:ext cx="481370" cy="307777"/>
+          </a:xfrm>
+          <a:prstGeom prst="rect">
+            <a:avLst/>
+          </a:prstGeom>
+          <a:noFill/>
+        </p:spPr>
+        <p:txBody>
+          <a:bodyPr wrap="square" rtlCol="0">
+            <a:spAutoFit/>
+          </a:bodyPr>
+          <a:lstStyle/>
+          <a:p>
+            <a:r>
+              <a:rPr lang="en-CA" sz="1400" dirty="0">
+                <a:solidFill>
+                  <a:srgbClr val="FF0000"/>
+                </a:solidFill>
+              </a:rPr>
+              <a:t>47</a:t>
+            </a:r>
+          </a:p>
+        </p:txBody>
+      </p:sp>
+      <p:sp>
+        <p:nvSpPr>
+          <p:cNvPr id="40" name="TextBox 39">
+            <a:extLst>
+              <a:ext uri="{FF2B5EF4-FFF2-40B4-BE49-F238E27FC236}">
+                <a16:creationId xmlns:a16="http://schemas.microsoft.com/office/drawing/2014/main" id="{9F3E9424-DED5-F3E0-8FC5-D5B34FA86AC5}"/>
+              </a:ext>
+            </a:extLst>
+          </p:cNvPr>
+          <p:cNvSpPr txBox="1"/>
+          <p:nvPr/>
+        </p:nvSpPr>
+        <p:spPr>
+          <a:xfrm>
+            <a:off x="6550768" y="506313"/>
+            <a:ext cx="481370" cy="307777"/>
+          </a:xfrm>
+          <a:prstGeom prst="rect">
+            <a:avLst/>
+          </a:prstGeom>
+          <a:noFill/>
+        </p:spPr>
+        <p:txBody>
+          <a:bodyPr wrap="square" rtlCol="0">
+            <a:spAutoFit/>
+          </a:bodyPr>
+          <a:lstStyle/>
+          <a:p>
+            <a:r>
+              <a:rPr lang="en-CA" sz="1400" dirty="0">
+                <a:solidFill>
+                  <a:srgbClr val="FF0000"/>
+                </a:solidFill>
+              </a:rPr>
+              <a:t>94</a:t>
+            </a:r>
+          </a:p>
+        </p:txBody>
+      </p:sp>
+      <p:sp>
+        <p:nvSpPr>
+          <p:cNvPr id="42" name="TextBox 41">
+            <a:extLst>
+              <a:ext uri="{FF2B5EF4-FFF2-40B4-BE49-F238E27FC236}">
+                <a16:creationId xmlns:a16="http://schemas.microsoft.com/office/drawing/2014/main" id="{800E9A4E-A8E2-1EF8-0A97-0E8198182C38}"/>
+              </a:ext>
+            </a:extLst>
+          </p:cNvPr>
+          <p:cNvSpPr txBox="1"/>
+          <p:nvPr/>
+        </p:nvSpPr>
+        <p:spPr>
+          <a:xfrm>
+            <a:off x="3247800" y="495297"/>
+            <a:ext cx="481370" cy="307777"/>
+          </a:xfrm>
+          <a:prstGeom prst="rect">
+            <a:avLst/>
+          </a:prstGeom>
+          <a:noFill/>
+        </p:spPr>
+        <p:txBody>
+          <a:bodyPr wrap="square" rtlCol="0">
+            <a:spAutoFit/>
+          </a:bodyPr>
+          <a:lstStyle/>
+          <a:p>
+            <a:r>
+              <a:rPr lang="en-CA" sz="1400" dirty="0">
+                <a:solidFill>
+                  <a:srgbClr val="FF0000"/>
+                </a:solidFill>
+              </a:rPr>
+              <a:t>92</a:t>
+            </a:r>
+          </a:p>
+        </p:txBody>
+      </p:sp>
+    </p:spTree>
+    <p:extLst>
+      <p:ext uri="{BB962C8B-B14F-4D97-AF65-F5344CB8AC3E}">
+        <p14:creationId xmlns:p14="http://schemas.microsoft.com/office/powerpoint/2010/main" val="3073851208"/>
+      </p:ext>
+    </p:extLst>
+  </p:cSld>
+  <p:clrMapOvr>
+    <a:masterClrMapping/>
+  </p:clrMapOvr>
+</p:sld>
+</file>
+
+<file path=ppt/slides/slide6.xml><?xml version="1.0" encoding="utf-8"?>
+<p:sld xmlns:a="http://schemas.openxmlformats.org/drawingml/2006/main" xmlns:r="http://schemas.openxmlformats.org/officeDocument/2006/relationships" xmlns:p="http://schemas.openxmlformats.org/presentationml/2006/main">
+  <p:cSld>
+    <p:spTree>
+      <p:nvGrpSpPr>
+        <p:cNvPr id="1" name=""/>
+        <p:cNvGrpSpPr/>
+        <p:nvPr/>
+      </p:nvGrpSpPr>
+      <p:grpSpPr>
+        <a:xfrm>
+          <a:off x="0" y="0"/>
+          <a:ext cx="0" cy="0"/>
+          <a:chOff x="0" y="0"/>
+          <a:chExt cx="0" cy="0"/>
+        </a:xfrm>
+      </p:grpSpPr>
+      <p:pic>
+        <p:nvPicPr>
+          <p:cNvPr id="3" name="Picture 2">
+            <a:extLst>
+              <a:ext uri="{FF2B5EF4-FFF2-40B4-BE49-F238E27FC236}">
+                <a16:creationId xmlns:a16="http://schemas.microsoft.com/office/drawing/2014/main" id="{DE9B4E40-AA87-F9B5-E7E9-D650805B4C51}"/>
+              </a:ext>
+            </a:extLst>
+          </p:cNvPr>
+          <p:cNvPicPr>
+            <a:picLocks noChangeAspect="1"/>
+          </p:cNvPicPr>
+          <p:nvPr/>
+        </p:nvPicPr>
+        <p:blipFill>
+          <a:blip r:embed="rId2">
+            <a:extLst>
+              <a:ext uri="{28A0092B-C50C-407E-A947-70E740481C1C}">
+                <a14:useLocalDpi xmlns:a14="http://schemas.microsoft.com/office/drawing/2010/main" val="0"/>
+              </a:ext>
+            </a:extLst>
+          </a:blip>
+          <a:stretch>
+            <a:fillRect/>
+          </a:stretch>
+        </p:blipFill>
+        <p:spPr>
+          <a:xfrm>
+            <a:off x="413980" y="0"/>
+            <a:ext cx="11883382" cy="6858000"/>
+          </a:xfrm>
+          <a:prstGeom prst="rect">
+            <a:avLst/>
+          </a:prstGeom>
+        </p:spPr>
+      </p:pic>
+      <p:sp>
+        <p:nvSpPr>
+          <p:cNvPr id="5" name="Rectangle 4">
+            <a:extLst>
+              <a:ext uri="{FF2B5EF4-FFF2-40B4-BE49-F238E27FC236}">
+                <a16:creationId xmlns:a16="http://schemas.microsoft.com/office/drawing/2014/main" id="{21283F0E-3C3F-261B-DBB9-764DF63F8600}"/>
+              </a:ext>
+            </a:extLst>
+          </p:cNvPr>
+          <p:cNvSpPr/>
+          <p:nvPr/>
+        </p:nvSpPr>
+        <p:spPr>
+          <a:xfrm flipH="1">
+            <a:off x="561975" y="4324349"/>
+            <a:ext cx="4924424" cy="561976"/>
+          </a:xfrm>
+          <a:prstGeom prst="rect">
+            <a:avLst/>
+          </a:prstGeom>
+          <a:noFill/>
+          <a:ln>
+            <a:solidFill>
+              <a:schemeClr val="accent6"/>
+            </a:solidFill>
+          </a:ln>
+        </p:spPr>
+        <p:style>
+          <a:lnRef idx="2">
+            <a:schemeClr val="accent1">
+              <a:shade val="15000"/>
+            </a:schemeClr>
+          </a:lnRef>
+          <a:fillRef idx="1">
+            <a:schemeClr val="accent1"/>
+          </a:fillRef>
+          <a:effectRef idx="0">
+            <a:schemeClr val="accent1"/>
+          </a:effectRef>
+          <a:fontRef idx="minor">
+            <a:schemeClr val="lt1"/>
+          </a:fontRef>
+        </p:style>
+        <p:txBody>
+          <a:bodyPr rtlCol="0" anchor="ctr"/>
+          <a:lstStyle/>
+          <a:p>
+            <a:pPr algn="ctr"/>
+            <a:endParaRPr lang="en-CA"/>
+          </a:p>
+        </p:txBody>
+      </p:sp>
+    </p:spTree>
+    <p:extLst>
+      <p:ext uri="{BB962C8B-B14F-4D97-AF65-F5344CB8AC3E}">
+        <p14:creationId xmlns:p14="http://schemas.microsoft.com/office/powerpoint/2010/main" val="2459348431"/>
       </p:ext>
     </p:extLst>
   </p:cSld>
@@ -4244,4 +5942,319 @@
     </a:ext>
   </a:extLst>
 </a:theme>
+</file>
+
+<file path=ppt/theme/theme2.xml><?xml version="1.0" encoding="utf-8"?>
+<a:theme xmlns:a="http://schemas.openxmlformats.org/drawingml/2006/main" name="Office Theme">
+  <a:themeElements>
+    <a:clrScheme name="Office">
+      <a:dk1>
+        <a:sysClr val="windowText" lastClr="000000"/>
+      </a:dk1>
+      <a:lt1>
+        <a:sysClr val="window" lastClr="FFFFFF"/>
+      </a:lt1>
+      <a:dk2>
+        <a:srgbClr val="0E2841"/>
+      </a:dk2>
+      <a:lt2>
+        <a:srgbClr val="E8E8E8"/>
+      </a:lt2>
+      <a:accent1>
+        <a:srgbClr val="156082"/>
+      </a:accent1>
+      <a:accent2>
+        <a:srgbClr val="E97132"/>
+      </a:accent2>
+      <a:accent3>
+        <a:srgbClr val="196B24"/>
+      </a:accent3>
+      <a:accent4>
+        <a:srgbClr val="0F9ED5"/>
+      </a:accent4>
+      <a:accent5>
+        <a:srgbClr val="A02B93"/>
+      </a:accent5>
+      <a:accent6>
+        <a:srgbClr val="4EA72E"/>
+      </a:accent6>
+      <a:hlink>
+        <a:srgbClr val="467886"/>
+      </a:hlink>
+      <a:folHlink>
+        <a:srgbClr val="96607D"/>
+      </a:folHlink>
+    </a:clrScheme>
+    <a:fontScheme name="Office">
+      <a:majorFont>
+        <a:latin typeface="Aptos Display" panose="02110004020202020204"/>
+        <a:ea typeface=""/>
+        <a:cs typeface=""/>
+        <a:font script="Jpan" typeface="游ゴシック Light"/>
+        <a:font script="Hang" typeface="맑은 고딕"/>
+        <a:font script="Hans" typeface="等线 Light"/>
+        <a:font script="Hant" typeface="新細明體"/>
+        <a:font script="Arab" typeface="Times New Roman"/>
+        <a:font script="Hebr" typeface="Times New Roman"/>
+        <a:font script="Thai" typeface="Angsana New"/>
+        <a:font script="Ethi" typeface="Nyala"/>
+        <a:font script="Beng" typeface="Vrinda"/>
+        <a:font script="Gujr" typeface="Shruti"/>
+        <a:font script="Khmr" typeface="MoolBoran"/>
+        <a:font script="Knda" typeface="Tunga"/>
+        <a:font script="Guru" typeface="Raavi"/>
+        <a:font script="Cans" typeface="Euphemia"/>
+        <a:font script="Cher" typeface="Plantagenet Cherokee"/>
+        <a:font script="Yiii" typeface="Microsoft Yi Baiti"/>
+        <a:font script="Tibt" typeface="Microsoft Himalaya"/>
+        <a:font script="Thaa" typeface="MV Boli"/>
+        <a:font script="Deva" typeface="Mangal"/>
+        <a:font script="Telu" typeface="Gautami"/>
+        <a:font script="Taml" typeface="Latha"/>
+        <a:font script="Syrc" typeface="Estrangelo Edessa"/>
+        <a:font script="Orya" typeface="Kalinga"/>
+        <a:font script="Mlym" typeface="Kartika"/>
+        <a:font script="Laoo" typeface="DokChampa"/>
+        <a:font script="Sinh" typeface="Iskoola Pota"/>
+        <a:font script="Mong" typeface="Mongolian Baiti"/>
+        <a:font script="Viet" typeface="Times New Roman"/>
+        <a:font script="Uigh" typeface="Microsoft Uighur"/>
+        <a:font script="Geor" typeface="Sylfaen"/>
+        <a:font script="Armn" typeface="Arial"/>
+        <a:font script="Bugi" typeface="Leelawadee UI"/>
+        <a:font script="Bopo" typeface="Microsoft JhengHei"/>
+        <a:font script="Java" typeface="Javanese Text"/>
+        <a:font script="Lisu" typeface="Segoe UI"/>
+        <a:font script="Mymr" typeface="Myanmar Text"/>
+        <a:font script="Nkoo" typeface="Ebrima"/>
+        <a:font script="Olck" typeface="Nirmala UI"/>
+        <a:font script="Osma" typeface="Ebrima"/>
+        <a:font script="Phag" typeface="Phagspa"/>
+        <a:font script="Syrn" typeface="Estrangelo Edessa"/>
+        <a:font script="Syrj" typeface="Estrangelo Edessa"/>
+        <a:font script="Syre" typeface="Estrangelo Edessa"/>
+        <a:font script="Sora" typeface="Nirmala UI"/>
+        <a:font script="Tale" typeface="Microsoft Tai Le"/>
+        <a:font script="Talu" typeface="Microsoft New Tai Lue"/>
+        <a:font script="Tfng" typeface="Ebrima"/>
+      </a:majorFont>
+      <a:minorFont>
+        <a:latin typeface="Aptos" panose="02110004020202020204"/>
+        <a:ea typeface=""/>
+        <a:cs typeface=""/>
+        <a:font script="Jpan" typeface="游ゴシック"/>
+        <a:font script="Hang" typeface="맑은 고딕"/>
+        <a:font script="Hans" typeface="等线"/>
+        <a:font script="Hant" typeface="新細明體"/>
+        <a:font script="Arab" typeface="Arial"/>
+        <a:font script="Hebr" typeface="Arial"/>
+        <a:font script="Thai" typeface="Cordia New"/>
+        <a:font script="Ethi" typeface="Nyala"/>
+        <a:font script="Beng" typeface="Vrinda"/>
+        <a:font script="Gujr" typeface="Shruti"/>
+        <a:font script="Khmr" typeface="DaunPenh"/>
+        <a:font script="Knda" typeface="Tunga"/>
+        <a:font script="Guru" typeface="Raavi"/>
+        <a:font script="Cans" typeface="Euphemia"/>
+        <a:font script="Cher" typeface="Plantagenet Cherokee"/>
+        <a:font script="Yiii" typeface="Microsoft Yi Baiti"/>
+        <a:font script="Tibt" typeface="Microsoft Himalaya"/>
+        <a:font script="Thaa" typeface="MV Boli"/>
+        <a:font script="Deva" typeface="Mangal"/>
+        <a:font script="Telu" typeface="Gautami"/>
+        <a:font script="Taml" typeface="Latha"/>
+        <a:font script="Syrc" typeface="Estrangelo Edessa"/>
+        <a:font script="Orya" typeface="Kalinga"/>
+        <a:font script="Mlym" typeface="Kartika"/>
+        <a:font script="Laoo" typeface="DokChampa"/>
+        <a:font script="Sinh" typeface="Iskoola Pota"/>
+        <a:font script="Mong" typeface="Mongolian Baiti"/>
+        <a:font script="Viet" typeface="Arial"/>
+        <a:font script="Uigh" typeface="Microsoft Uighur"/>
+        <a:font script="Geor" typeface="Sylfaen"/>
+        <a:font script="Armn" typeface="Arial"/>
+        <a:font script="Bugi" typeface="Leelawadee UI"/>
+        <a:font script="Bopo" typeface="Microsoft JhengHei"/>
+        <a:font script="Java" typeface="Javanese Text"/>
+        <a:font script="Lisu" typeface="Segoe UI"/>
+        <a:font script="Mymr" typeface="Myanmar Text"/>
+        <a:font script="Nkoo" typeface="Ebrima"/>
+        <a:font script="Olck" typeface="Nirmala UI"/>
+        <a:font script="Osma" typeface="Ebrima"/>
+        <a:font script="Phag" typeface="Phagspa"/>
+        <a:font script="Syrn" typeface="Estrangelo Edessa"/>
+        <a:font script="Syrj" typeface="Estrangelo Edessa"/>
+        <a:font script="Syre" typeface="Estrangelo Edessa"/>
+        <a:font script="Sora" typeface="Nirmala UI"/>
+        <a:font script="Tale" typeface="Microsoft Tai Le"/>
+        <a:font script="Talu" typeface="Microsoft New Tai Lue"/>
+        <a:font script="Tfng" typeface="Ebrima"/>
+      </a:minorFont>
+    </a:fontScheme>
+    <a:fmtScheme name="Office">
+      <a:fillStyleLst>
+        <a:solidFill>
+          <a:schemeClr val="phClr"/>
+        </a:solidFill>
+        <a:gradFill rotWithShape="1">
+          <a:gsLst>
+            <a:gs pos="0">
+              <a:schemeClr val="phClr">
+                <a:lumMod val="110000"/>
+                <a:satMod val="105000"/>
+                <a:tint val="67000"/>
+              </a:schemeClr>
+            </a:gs>
+            <a:gs pos="50000">
+              <a:schemeClr val="phClr">
+                <a:lumMod val="105000"/>
+                <a:satMod val="103000"/>
+                <a:tint val="73000"/>
+              </a:schemeClr>
+            </a:gs>
+            <a:gs pos="100000">
+              <a:schemeClr val="phClr">
+                <a:lumMod val="105000"/>
+                <a:satMod val="109000"/>
+                <a:tint val="81000"/>
+              </a:schemeClr>
+            </a:gs>
+          </a:gsLst>
+          <a:lin ang="5400000" scaled="0"/>
+        </a:gradFill>
+        <a:gradFill rotWithShape="1">
+          <a:gsLst>
+            <a:gs pos="0">
+              <a:schemeClr val="phClr">
+                <a:satMod val="103000"/>
+                <a:lumMod val="102000"/>
+                <a:tint val="94000"/>
+              </a:schemeClr>
+            </a:gs>
+            <a:gs pos="50000">
+              <a:schemeClr val="phClr">
+                <a:satMod val="110000"/>
+                <a:lumMod val="100000"/>
+                <a:shade val="100000"/>
+              </a:schemeClr>
+            </a:gs>
+            <a:gs pos="100000">
+              <a:schemeClr val="phClr">
+                <a:lumMod val="99000"/>
+                <a:satMod val="120000"/>
+                <a:shade val="78000"/>
+              </a:schemeClr>
+            </a:gs>
+          </a:gsLst>
+          <a:lin ang="5400000" scaled="0"/>
+        </a:gradFill>
+      </a:fillStyleLst>
+      <a:lnStyleLst>
+        <a:ln w="12700" cap="flat" cmpd="sng" algn="ctr">
+          <a:solidFill>
+            <a:schemeClr val="phClr"/>
+          </a:solidFill>
+          <a:prstDash val="solid"/>
+          <a:miter lim="800000"/>
+        </a:ln>
+        <a:ln w="19050" cap="flat" cmpd="sng" algn="ctr">
+          <a:solidFill>
+            <a:schemeClr val="phClr"/>
+          </a:solidFill>
+          <a:prstDash val="solid"/>
+          <a:miter lim="800000"/>
+        </a:ln>
+        <a:ln w="25400" cap="flat" cmpd="sng" algn="ctr">
+          <a:solidFill>
+            <a:schemeClr val="phClr"/>
+          </a:solidFill>
+          <a:prstDash val="solid"/>
+          <a:miter lim="800000"/>
+        </a:ln>
+      </a:lnStyleLst>
+      <a:effectStyleLst>
+        <a:effectStyle>
+          <a:effectLst/>
+        </a:effectStyle>
+        <a:effectStyle>
+          <a:effectLst/>
+        </a:effectStyle>
+        <a:effectStyle>
+          <a:effectLst>
+            <a:outerShdw blurRad="57150" dist="19050" dir="5400000" algn="ctr" rotWithShape="0">
+              <a:srgbClr val="000000">
+                <a:alpha val="63000"/>
+              </a:srgbClr>
+            </a:outerShdw>
+          </a:effectLst>
+        </a:effectStyle>
+      </a:effectStyleLst>
+      <a:bgFillStyleLst>
+        <a:solidFill>
+          <a:schemeClr val="phClr"/>
+        </a:solidFill>
+        <a:solidFill>
+          <a:schemeClr val="phClr">
+            <a:tint val="95000"/>
+            <a:satMod val="170000"/>
+          </a:schemeClr>
+        </a:solidFill>
+        <a:gradFill rotWithShape="1">
+          <a:gsLst>
+            <a:gs pos="0">
+              <a:schemeClr val="phClr">
+                <a:tint val="93000"/>
+                <a:satMod val="150000"/>
+                <a:shade val="98000"/>
+                <a:lumMod val="102000"/>
+              </a:schemeClr>
+            </a:gs>
+            <a:gs pos="50000">
+              <a:schemeClr val="phClr">
+                <a:tint val="98000"/>
+                <a:satMod val="130000"/>
+                <a:shade val="90000"/>
+                <a:lumMod val="103000"/>
+              </a:schemeClr>
+            </a:gs>
+            <a:gs pos="100000">
+              <a:schemeClr val="phClr">
+                <a:shade val="63000"/>
+                <a:satMod val="120000"/>
+              </a:schemeClr>
+            </a:gs>
+          </a:gsLst>
+          <a:lin ang="5400000" scaled="0"/>
+        </a:gradFill>
+      </a:bgFillStyleLst>
+    </a:fmtScheme>
+  </a:themeElements>
+  <a:objectDefaults>
+    <a:lnDef>
+      <a:spPr/>
+      <a:bodyPr/>
+      <a:lstStyle/>
+      <a:style>
+        <a:lnRef idx="2">
+          <a:schemeClr val="accent1"/>
+        </a:lnRef>
+        <a:fillRef idx="0">
+          <a:schemeClr val="accent1"/>
+        </a:fillRef>
+        <a:effectRef idx="1">
+          <a:schemeClr val="accent1"/>
+        </a:effectRef>
+        <a:fontRef idx="minor">
+          <a:schemeClr val="tx1"/>
+        </a:fontRef>
+      </a:style>
+    </a:lnDef>
+  </a:objectDefaults>
+  <a:extraClrSchemeLst/>
+  <a:extLst>
+    <a:ext uri="{05A4C25C-085E-4340-85A3-A5531E510DB2}">
+      <thm15:themeFamily xmlns:thm15="http://schemas.microsoft.com/office/thememl/2012/main" name="Office Theme" id="{2E142A2C-CD16-42D6-873A-C26D2A0506FA}" vid="{1BDDFF52-6CD6-40A5-AB3C-68EB2F1E4D0A}"/>
+    </a:ext>
+  </a:extLst>
+</a:theme>
 </file>
--- a/StrokeCog.pptx
+++ b/StrokeCog.pptx
@@ -5,7 +5,7 @@
     <p:sldMasterId id="2147483648" r:id="rId1"/>
   </p:sldMasterIdLst>
   <p:notesMasterIdLst>
-    <p:notesMasterId r:id="rId8"/>
+    <p:notesMasterId r:id="rId10"/>
   </p:notesMasterIdLst>
   <p:sldIdLst>
     <p:sldId id="256" r:id="rId2"/>
@@ -14,6 +14,8 @@
     <p:sldId id="259" r:id="rId5"/>
     <p:sldId id="260" r:id="rId6"/>
     <p:sldId id="261" r:id="rId7"/>
+    <p:sldId id="262" r:id="rId8"/>
+    <p:sldId id="263" r:id="rId9"/>
   </p:sldIdLst>
   <p:sldSz cx="12192000" cy="6858000"/>
   <p:notesSz cx="6858000" cy="9144000"/>
@@ -202,7 +204,7 @@
           <a:p>
             <a:fld id="{19F579D8-1E49-4757-B5B6-80F0A8C2CECC}" type="datetimeFigureOut">
               <a:rPr lang="en-CA" smtClean="0"/>
-              <a:t>2026-06-23</a:t>
+              <a:t>2026-06-25</a:t>
             </a:fld>
             <a:endParaRPr lang="en-CA"/>
           </a:p>
@@ -703,7 +705,7 @@
           <a:p>
             <a:fld id="{023DAACC-802D-41C7-9E2E-CB0B8FD3C71D}" type="datetimeFigureOut">
               <a:rPr lang="en-CA" smtClean="0"/>
-              <a:t>2026-06-23</a:t>
+              <a:t>2026-06-25</a:t>
             </a:fld>
             <a:endParaRPr lang="en-CA"/>
           </a:p>
@@ -903,7 +905,7 @@
           <a:p>
             <a:fld id="{023DAACC-802D-41C7-9E2E-CB0B8FD3C71D}" type="datetimeFigureOut">
               <a:rPr lang="en-CA" smtClean="0"/>
-              <a:t>2026-06-23</a:t>
+              <a:t>2026-06-25</a:t>
             </a:fld>
             <a:endParaRPr lang="en-CA"/>
           </a:p>
@@ -1113,7 +1115,7 @@
           <a:p>
             <a:fld id="{023DAACC-802D-41C7-9E2E-CB0B8FD3C71D}" type="datetimeFigureOut">
               <a:rPr lang="en-CA" smtClean="0"/>
-              <a:t>2026-06-23</a:t>
+              <a:t>2026-06-25</a:t>
             </a:fld>
             <a:endParaRPr lang="en-CA"/>
           </a:p>
@@ -1313,7 +1315,7 @@
           <a:p>
             <a:fld id="{023DAACC-802D-41C7-9E2E-CB0B8FD3C71D}" type="datetimeFigureOut">
               <a:rPr lang="en-CA" smtClean="0"/>
-              <a:t>2026-06-23</a:t>
+              <a:t>2026-06-25</a:t>
             </a:fld>
             <a:endParaRPr lang="en-CA"/>
           </a:p>
@@ -1589,7 +1591,7 @@
           <a:p>
             <a:fld id="{023DAACC-802D-41C7-9E2E-CB0B8FD3C71D}" type="datetimeFigureOut">
               <a:rPr lang="en-CA" smtClean="0"/>
-              <a:t>2026-06-23</a:t>
+              <a:t>2026-06-25</a:t>
             </a:fld>
             <a:endParaRPr lang="en-CA"/>
           </a:p>
@@ -1857,7 +1859,7 @@
           <a:p>
             <a:fld id="{023DAACC-802D-41C7-9E2E-CB0B8FD3C71D}" type="datetimeFigureOut">
               <a:rPr lang="en-CA" smtClean="0"/>
-              <a:t>2026-06-23</a:t>
+              <a:t>2026-06-25</a:t>
             </a:fld>
             <a:endParaRPr lang="en-CA"/>
           </a:p>
@@ -2272,7 +2274,7 @@
           <a:p>
             <a:fld id="{023DAACC-802D-41C7-9E2E-CB0B8FD3C71D}" type="datetimeFigureOut">
               <a:rPr lang="en-CA" smtClean="0"/>
-              <a:t>2026-06-23</a:t>
+              <a:t>2026-06-25</a:t>
             </a:fld>
             <a:endParaRPr lang="en-CA"/>
           </a:p>
@@ -2414,7 +2416,7 @@
           <a:p>
             <a:fld id="{023DAACC-802D-41C7-9E2E-CB0B8FD3C71D}" type="datetimeFigureOut">
               <a:rPr lang="en-CA" smtClean="0"/>
-              <a:t>2026-06-23</a:t>
+              <a:t>2026-06-25</a:t>
             </a:fld>
             <a:endParaRPr lang="en-CA"/>
           </a:p>
@@ -2527,7 +2529,7 @@
           <a:p>
             <a:fld id="{023DAACC-802D-41C7-9E2E-CB0B8FD3C71D}" type="datetimeFigureOut">
               <a:rPr lang="en-CA" smtClean="0"/>
-              <a:t>2026-06-23</a:t>
+              <a:t>2026-06-25</a:t>
             </a:fld>
             <a:endParaRPr lang="en-CA"/>
           </a:p>
@@ -2840,7 +2842,7 @@
           <a:p>
             <a:fld id="{023DAACC-802D-41C7-9E2E-CB0B8FD3C71D}" type="datetimeFigureOut">
               <a:rPr lang="en-CA" smtClean="0"/>
-              <a:t>2026-06-23</a:t>
+              <a:t>2026-06-25</a:t>
             </a:fld>
             <a:endParaRPr lang="en-CA"/>
           </a:p>
@@ -3129,7 +3131,7 @@
           <a:p>
             <a:fld id="{023DAACC-802D-41C7-9E2E-CB0B8FD3C71D}" type="datetimeFigureOut">
               <a:rPr lang="en-CA" smtClean="0"/>
-              <a:t>2026-06-23</a:t>
+              <a:t>2026-06-25</a:t>
             </a:fld>
             <a:endParaRPr lang="en-CA"/>
           </a:p>
@@ -3372,7 +3374,7 @@
           <a:p>
             <a:fld id="{023DAACC-802D-41C7-9E2E-CB0B8FD3C71D}" type="datetimeFigureOut">
               <a:rPr lang="en-CA" smtClean="0"/>
-              <a:t>2026-06-23</a:t>
+              <a:t>2026-06-25</a:t>
             </a:fld>
             <a:endParaRPr lang="en-CA"/>
           </a:p>
@@ -4965,7 +4967,7 @@
         </p:blipFill>
         <p:spPr>
           <a:xfrm>
-            <a:off x="-7284886" y="-241606"/>
+            <a:off x="-9280895" y="282269"/>
             <a:ext cx="9983593" cy="2248214"/>
           </a:xfrm>
           <a:prstGeom prst="rect">
@@ -4995,7 +4997,7 @@
         </p:blipFill>
         <p:spPr>
           <a:xfrm>
-            <a:off x="-8582057" y="3543581"/>
+            <a:off x="-9052154" y="2679462"/>
             <a:ext cx="8973802" cy="3896269"/>
           </a:xfrm>
           <a:prstGeom prst="rect">
@@ -5498,6 +5500,42 @@
           </a:p>
         </p:txBody>
       </p:sp>
+      <p:pic>
+        <p:nvPicPr>
+          <p:cNvPr id="5" name="Picture 4">
+            <a:extLst>
+              <a:ext uri="{FF2B5EF4-FFF2-40B4-BE49-F238E27FC236}">
+                <a16:creationId xmlns:a16="http://schemas.microsoft.com/office/drawing/2014/main" id="{EA92BD68-0F38-E07D-3154-6B579C92DD2B}"/>
+              </a:ext>
+            </a:extLst>
+          </p:cNvPr>
+          <p:cNvPicPr>
+            <a:picLocks noChangeAspect="1"/>
+          </p:cNvPicPr>
+          <p:nvPr/>
+        </p:nvPicPr>
+        <p:blipFill>
+          <a:blip r:embed="rId3">
+            <a:extLst>
+              <a:ext uri="{28A0092B-C50C-407E-A947-70E740481C1C}">
+                <a14:useLocalDpi xmlns:a14="http://schemas.microsoft.com/office/drawing/2010/main" val="0"/>
+              </a:ext>
+            </a:extLst>
+          </a:blip>
+          <a:stretch>
+            <a:fillRect/>
+          </a:stretch>
+        </p:blipFill>
+        <p:spPr>
+          <a:xfrm>
+            <a:off x="-125657" y="2423160"/>
+            <a:ext cx="6308546" cy="6858000"/>
+          </a:xfrm>
+          <a:prstGeom prst="rect">
+            <a:avLst/>
+          </a:prstGeom>
+        </p:spPr>
+      </p:pic>
     </p:spTree>
     <p:extLst>
       <p:ext uri="{BB962C8B-B14F-4D97-AF65-F5344CB8AC3E}">
@@ -5620,6 +5658,192 @@
     <p:extLst>
       <p:ext uri="{BB962C8B-B14F-4D97-AF65-F5344CB8AC3E}">
         <p14:creationId xmlns:p14="http://schemas.microsoft.com/office/powerpoint/2010/main" val="2459348431"/>
+      </p:ext>
+    </p:extLst>
+  </p:cSld>
+  <p:clrMapOvr>
+    <a:masterClrMapping/>
+  </p:clrMapOvr>
+</p:sld>
+</file>
+
+<file path=ppt/slides/slide7.xml><?xml version="1.0" encoding="utf-8"?>
+<p:sld xmlns:a="http://schemas.openxmlformats.org/drawingml/2006/main" xmlns:r="http://schemas.openxmlformats.org/officeDocument/2006/relationships" xmlns:p="http://schemas.openxmlformats.org/presentationml/2006/main">
+  <p:cSld>
+    <p:spTree>
+      <p:nvGrpSpPr>
+        <p:cNvPr id="1" name=""/>
+        <p:cNvGrpSpPr/>
+        <p:nvPr/>
+      </p:nvGrpSpPr>
+      <p:grpSpPr>
+        <a:xfrm>
+          <a:off x="0" y="0"/>
+          <a:ext cx="0" cy="0"/>
+          <a:chOff x="0" y="0"/>
+          <a:chExt cx="0" cy="0"/>
+        </a:xfrm>
+      </p:grpSpPr>
+      <p:pic>
+        <p:nvPicPr>
+          <p:cNvPr id="3" name="Picture 2">
+            <a:extLst>
+              <a:ext uri="{FF2B5EF4-FFF2-40B4-BE49-F238E27FC236}">
+                <a16:creationId xmlns:a16="http://schemas.microsoft.com/office/drawing/2014/main" id="{78167380-F157-39B2-5633-7DF55E849688}"/>
+              </a:ext>
+            </a:extLst>
+          </p:cNvPr>
+          <p:cNvPicPr>
+            <a:picLocks noChangeAspect="1"/>
+          </p:cNvPicPr>
+          <p:nvPr/>
+        </p:nvPicPr>
+        <p:blipFill>
+          <a:blip r:embed="rId2"/>
+          <a:stretch>
+            <a:fillRect/>
+          </a:stretch>
+        </p:blipFill>
+        <p:spPr>
+          <a:xfrm>
+            <a:off x="0" y="1291342"/>
+            <a:ext cx="9478698" cy="3543795"/>
+          </a:xfrm>
+          <a:prstGeom prst="rect">
+            <a:avLst/>
+          </a:prstGeom>
+        </p:spPr>
+      </p:pic>
+      <p:pic>
+        <p:nvPicPr>
+          <p:cNvPr id="7" name="Picture 6">
+            <a:extLst>
+              <a:ext uri="{FF2B5EF4-FFF2-40B4-BE49-F238E27FC236}">
+                <a16:creationId xmlns:a16="http://schemas.microsoft.com/office/drawing/2014/main" id="{A90E822D-EF78-D69C-DAA4-425F829C0C92}"/>
+              </a:ext>
+            </a:extLst>
+          </p:cNvPr>
+          <p:cNvPicPr>
+            <a:picLocks noChangeAspect="1"/>
+          </p:cNvPicPr>
+          <p:nvPr/>
+        </p:nvPicPr>
+        <p:blipFill>
+          <a:blip r:embed="rId3"/>
+          <a:stretch>
+            <a:fillRect/>
+          </a:stretch>
+        </p:blipFill>
+        <p:spPr>
+          <a:xfrm>
+            <a:off x="1583698" y="0"/>
+            <a:ext cx="9024603" cy="6858000"/>
+          </a:xfrm>
+          <a:prstGeom prst="rect">
+            <a:avLst/>
+          </a:prstGeom>
+        </p:spPr>
+      </p:pic>
+    </p:spTree>
+    <p:extLst>
+      <p:ext uri="{BB962C8B-B14F-4D97-AF65-F5344CB8AC3E}">
+        <p14:creationId xmlns:p14="http://schemas.microsoft.com/office/powerpoint/2010/main" val="1976791476"/>
+      </p:ext>
+    </p:extLst>
+  </p:cSld>
+  <p:clrMapOvr>
+    <a:masterClrMapping/>
+  </p:clrMapOvr>
+</p:sld>
+</file>
+
+<file path=ppt/slides/slide8.xml><?xml version="1.0" encoding="utf-8"?>
+<p:sld xmlns:a="http://schemas.openxmlformats.org/drawingml/2006/main" xmlns:r="http://schemas.openxmlformats.org/officeDocument/2006/relationships" xmlns:p="http://schemas.openxmlformats.org/presentationml/2006/main">
+  <p:cSld>
+    <p:spTree>
+      <p:nvGrpSpPr>
+        <p:cNvPr id="1" name=""/>
+        <p:cNvGrpSpPr/>
+        <p:nvPr/>
+      </p:nvGrpSpPr>
+      <p:grpSpPr>
+        <a:xfrm>
+          <a:off x="0" y="0"/>
+          <a:ext cx="0" cy="0"/>
+          <a:chOff x="0" y="0"/>
+          <a:chExt cx="0" cy="0"/>
+        </a:xfrm>
+      </p:grpSpPr>
+      <p:pic>
+        <p:nvPicPr>
+          <p:cNvPr id="13" name="Picture 12">
+            <a:extLst>
+              <a:ext uri="{FF2B5EF4-FFF2-40B4-BE49-F238E27FC236}">
+                <a16:creationId xmlns:a16="http://schemas.microsoft.com/office/drawing/2014/main" id="{35092A7E-5430-A9FE-DA05-420E6C437769}"/>
+              </a:ext>
+            </a:extLst>
+          </p:cNvPr>
+          <p:cNvPicPr>
+            <a:picLocks noChangeAspect="1"/>
+          </p:cNvPicPr>
+          <p:nvPr/>
+        </p:nvPicPr>
+        <p:blipFill>
+          <a:blip r:embed="rId2"/>
+          <a:stretch>
+            <a:fillRect/>
+          </a:stretch>
+        </p:blipFill>
+        <p:spPr>
+          <a:xfrm>
+            <a:off x="7745819" y="752065"/>
+            <a:ext cx="6064634" cy="2267381"/>
+          </a:xfrm>
+          <a:prstGeom prst="rect">
+            <a:avLst/>
+          </a:prstGeom>
+        </p:spPr>
+      </p:pic>
+      <p:pic>
+        <p:nvPicPr>
+          <p:cNvPr id="17" name="Picture 16">
+            <a:extLst>
+              <a:ext uri="{FF2B5EF4-FFF2-40B4-BE49-F238E27FC236}">
+                <a16:creationId xmlns:a16="http://schemas.microsoft.com/office/drawing/2014/main" id="{7EF2C3BF-43D4-6E98-9295-B1FFE0E57BF5}"/>
+              </a:ext>
+            </a:extLst>
+          </p:cNvPr>
+          <p:cNvPicPr>
+            <a:picLocks noChangeAspect="1"/>
+          </p:cNvPicPr>
+          <p:nvPr/>
+        </p:nvPicPr>
+        <p:blipFill>
+          <a:blip r:embed="rId3">
+            <a:extLst>
+              <a:ext uri="{28A0092B-C50C-407E-A947-70E740481C1C}">
+                <a14:useLocalDpi xmlns:a14="http://schemas.microsoft.com/office/drawing/2010/main" val="0"/>
+              </a:ext>
+            </a:extLst>
+          </a:blip>
+          <a:stretch>
+            <a:fillRect/>
+          </a:stretch>
+        </p:blipFill>
+        <p:spPr>
+          <a:xfrm>
+            <a:off x="1969753" y="661670"/>
+            <a:ext cx="5727098" cy="5988589"/>
+          </a:xfrm>
+          <a:prstGeom prst="rect">
+            <a:avLst/>
+          </a:prstGeom>
+        </p:spPr>
+      </p:pic>
+    </p:spTree>
+    <p:extLst>
+      <p:ext uri="{BB962C8B-B14F-4D97-AF65-F5344CB8AC3E}">
+        <p14:creationId xmlns:p14="http://schemas.microsoft.com/office/powerpoint/2010/main" val="476682284"/>
       </p:ext>
     </p:extLst>
   </p:cSld>

--- a/StrokeCog.pptx
+++ b/StrokeCog.pptx
@@ -5,7 +5,7 @@
     <p:sldMasterId id="2147483648" r:id="rId1"/>
   </p:sldMasterIdLst>
   <p:notesMasterIdLst>
-    <p:notesMasterId r:id="rId10"/>
+    <p:notesMasterId r:id="rId11"/>
   </p:notesMasterIdLst>
   <p:sldIdLst>
     <p:sldId id="256" r:id="rId2"/>
@@ -16,6 +16,7 @@
     <p:sldId id="261" r:id="rId7"/>
     <p:sldId id="262" r:id="rId8"/>
     <p:sldId id="263" r:id="rId9"/>
+    <p:sldId id="264" r:id="rId10"/>
   </p:sldIdLst>
   <p:sldSz cx="12192000" cy="6858000"/>
   <p:notesSz cx="6858000" cy="9144000"/>
@@ -5796,7 +5797,7 @@
         </p:blipFill>
         <p:spPr>
           <a:xfrm>
-            <a:off x="7745819" y="752065"/>
+            <a:off x="7839604" y="661670"/>
             <a:ext cx="6064634" cy="2267381"/>
           </a:xfrm>
           <a:prstGeom prst="rect">
@@ -5844,6 +5845,66 @@
     <p:extLst>
       <p:ext uri="{BB962C8B-B14F-4D97-AF65-F5344CB8AC3E}">
         <p14:creationId xmlns:p14="http://schemas.microsoft.com/office/powerpoint/2010/main" val="476682284"/>
+      </p:ext>
+    </p:extLst>
+  </p:cSld>
+  <p:clrMapOvr>
+    <a:masterClrMapping/>
+  </p:clrMapOvr>
+</p:sld>
+</file>
+
+<file path=ppt/slides/slide9.xml><?xml version="1.0" encoding="utf-8"?>
+<p:sld xmlns:a="http://schemas.openxmlformats.org/drawingml/2006/main" xmlns:r="http://schemas.openxmlformats.org/officeDocument/2006/relationships" xmlns:p="http://schemas.openxmlformats.org/presentationml/2006/main">
+  <p:cSld>
+    <p:spTree>
+      <p:nvGrpSpPr>
+        <p:cNvPr id="1" name=""/>
+        <p:cNvGrpSpPr/>
+        <p:nvPr/>
+      </p:nvGrpSpPr>
+      <p:grpSpPr>
+        <a:xfrm>
+          <a:off x="0" y="0"/>
+          <a:ext cx="0" cy="0"/>
+          <a:chOff x="0" y="0"/>
+          <a:chExt cx="0" cy="0"/>
+        </a:xfrm>
+      </p:grpSpPr>
+      <p:pic>
+        <p:nvPicPr>
+          <p:cNvPr id="3" name="Picture 2">
+            <a:extLst>
+              <a:ext uri="{FF2B5EF4-FFF2-40B4-BE49-F238E27FC236}">
+                <a16:creationId xmlns:a16="http://schemas.microsoft.com/office/drawing/2014/main" id="{3F69304C-7960-03B7-5558-725CEAB91148}"/>
+              </a:ext>
+            </a:extLst>
+          </p:cNvPr>
+          <p:cNvPicPr>
+            <a:picLocks noChangeAspect="1"/>
+          </p:cNvPicPr>
+          <p:nvPr/>
+        </p:nvPicPr>
+        <p:blipFill>
+          <a:blip r:embed="rId2"/>
+          <a:stretch>
+            <a:fillRect/>
+          </a:stretch>
+        </p:blipFill>
+        <p:spPr>
+          <a:xfrm>
+            <a:off x="1280440" y="637785"/>
+            <a:ext cx="9631119" cy="5582429"/>
+          </a:xfrm>
+          <a:prstGeom prst="rect">
+            <a:avLst/>
+          </a:prstGeom>
+        </p:spPr>
+      </p:pic>
+    </p:spTree>
+    <p:extLst>
+      <p:ext uri="{BB962C8B-B14F-4D97-AF65-F5344CB8AC3E}">
+        <p14:creationId xmlns:p14="http://schemas.microsoft.com/office/powerpoint/2010/main" val="1654773178"/>
       </p:ext>
     </p:extLst>
   </p:cSld>
